--- a/courses/道德经_第24天.pptx
+++ b/courses/道德经_第24天.pptx
@@ -17,6 +17,8 @@
     <p:sldId id="265" r:id="rId16"/>
     <p:sldId id="266" r:id="rId17"/>
     <p:sldId id="267" r:id="rId18"/>
+    <p:sldId id="268" r:id="rId19"/>
+    <p:sldId id="269" r:id="rId20"/>
   </p:sldIdLst>
   <p:sldSz cx="9144000" cy="6858000" type="screen4x3"/>
   <p:notesSz cx="6858000" cy="9144000"/>
@@ -3108,13 +3110,13 @@
         <p:spPr>
           <a:xfrm>
             <a:off x="0" y="0"/>
-            <a:ext cx="9144000" cy="2011680"/>
+            <a:ext cx="9144000" cy="1463040"/>
           </a:xfrm>
           <a:prstGeom prst="rect">
             <a:avLst/>
           </a:prstGeom>
           <a:solidFill>
-            <a:srgbClr val="00529B"/>
+            <a:srgbClr val="1E3C72"/>
           </a:solidFill>
           <a:ln>
             <a:noFill/>
@@ -3150,8 +3152,8 @@
         </p:nvSpPr>
         <p:spPr>
           <a:xfrm>
-            <a:off x="457200" y="320040"/>
-            <a:ext cx="8229600" cy="914400"/>
+            <a:off x="548640" y="365760"/>
+            <a:ext cx="8229600" cy="822960"/>
           </a:xfrm>
           <a:prstGeom prst="rect">
             <a:avLst/>
@@ -3165,7 +3167,7 @@
           <a:lstStyle/>
           <a:p>
             <a:pPr>
-              <a:defRPr sz="3600" b="1">
+              <a:defRPr sz="3800" b="1">
                 <a:solidFill>
                   <a:srgbClr val="FFFFFF"/>
                 </a:solidFill>
@@ -3186,7 +3188,7 @@
         <p:spPr>
           <a:xfrm>
             <a:off x="914400" y="2560320"/>
-            <a:ext cx="7315200" cy="1371600"/>
+            <a:ext cx="7315200" cy="1463040"/>
           </a:xfrm>
           <a:prstGeom prst="rect">
             <a:avLst/>
@@ -3200,14 +3202,14 @@
           <a:lstStyle/>
           <a:p>
             <a:pPr algn="ctr">
-              <a:defRPr sz="5600" b="1">
-                <a:solidFill>
-                  <a:srgbClr val="00529B"/>
-                </a:solidFill>
-              </a:defRPr>
-            </a:pPr>
-            <a:r>
-              <a:t>《道德经》第73-75章</a:t>
+              <a:defRPr sz="5800" b="1">
+                <a:solidFill>
+                  <a:srgbClr val="1E3C72"/>
+                </a:solidFill>
+              </a:defRPr>
+            </a:pPr>
+            <a:r>
+              <a:t>《道德经》第76-78章</a:t>
             </a:r>
           </a:p>
         </p:txBody>
@@ -3220,8 +3222,8 @@
         </p:nvSpPr>
         <p:spPr>
           <a:xfrm>
-            <a:off x="914400" y="4114800"/>
-            <a:ext cx="7315200" cy="914400"/>
+            <a:off x="914400" y="4206240"/>
+            <a:ext cx="7315200" cy="822960"/>
           </a:xfrm>
           <a:prstGeom prst="rect">
             <a:avLst/>
@@ -3237,12 +3239,12 @@
             <a:pPr algn="ctr">
               <a:defRPr sz="2800">
                 <a:solidFill>
-                  <a:srgbClr val="404040"/>
-                </a:solidFill>
-              </a:defRPr>
-            </a:pPr>
-            <a:r>
-              <a:t>勇于敢则杀 · 天网恢恢</a:t>
+                  <a:srgbClr val="4682B4"/>
+                </a:solidFill>
+              </a:defRPr>
+            </a:pPr>
+            <a:r>
+              <a:t>出生入死 · 柔弱处上 · 为而不争</a:t>
             </a:r>
           </a:p>
         </p:txBody>
@@ -3255,14 +3257,14 @@
         </p:nvSpPr>
         <p:spPr>
           <a:xfrm>
-            <a:off x="1828800" y="5303520"/>
+            <a:off x="1828800" y="5486400"/>
             <a:ext cx="5486400" cy="1097280"/>
           </a:xfrm>
           <a:prstGeom prst="roundRect">
             <a:avLst/>
           </a:prstGeom>
           <a:solidFill>
-            <a:srgbClr val="F2F6FA"/>
+            <a:srgbClr val="14233C"/>
           </a:solidFill>
         </p:spPr>
         <p:style>
@@ -3286,24 +3288,24 @@
             <a:pPr algn="ctr">
               <a:defRPr sz="2400" i="1">
                 <a:solidFill>
-                  <a:srgbClr val="00529B"/>
-                </a:solidFill>
-              </a:defRPr>
-            </a:pPr>
-            <a:r>
-              <a:t>勇于不敢则活，此两者，或利或害。</a:t>
+                  <a:srgbClr val="FFFFFF"/>
+                </a:solidFill>
+              </a:defRPr>
+            </a:pPr>
+            <a:r>
+              <a:t>天下莫柔弱于水，而攻坚强者莫之能胜。</a:t>
             </a:r>
           </a:p>
           <a:p>
             <a:pPr algn="ctr">
               <a:defRPr sz="1400">
                 <a:solidFill>
-                  <a:srgbClr val="404040"/>
-                </a:solidFill>
-              </a:defRPr>
-            </a:pPr>
-            <a:r>
-              <a:t>—— 第七十三章</a:t>
+                  <a:srgbClr val="B4B4B4"/>
+                </a:solidFill>
+              </a:defRPr>
+            </a:pPr>
+            <a:r>
+              <a:t>—— 第七十八章</a:t>
             </a:r>
           </a:p>
         </p:txBody>
@@ -3316,8 +3318,8 @@
         </p:nvSpPr>
         <p:spPr>
           <a:xfrm>
-            <a:off x="8503920" y="6492240"/>
-            <a:ext cx="457200" cy="274320"/>
+            <a:off x="8229600" y="6492240"/>
+            <a:ext cx="731520" cy="274320"/>
           </a:xfrm>
           <a:prstGeom prst="rect">
             <a:avLst/>
@@ -3331,14 +3333,14 @@
           <a:lstStyle/>
           <a:p>
             <a:pPr algn="r">
-              <a:defRPr sz="1000">
+              <a:defRPr sz="1200">
                 <a:solidFill>
                   <a:srgbClr val="969696"/>
                 </a:solidFill>
               </a:defRPr>
             </a:pPr>
             <a:r>
-              <a:t>1/12</a:t>
+              <a:t>1/14</a:t>
             </a:r>
           </a:p>
         </p:txBody>
@@ -3370,13 +3372,13 @@
         <p:spPr>
           <a:xfrm>
             <a:off x="0" y="0"/>
-            <a:ext cx="9144000" cy="1005840"/>
+            <a:ext cx="9144000" cy="1188720"/>
           </a:xfrm>
           <a:prstGeom prst="rect">
             <a:avLst/>
           </a:prstGeom>
           <a:solidFill>
-            <a:srgbClr val="00529B"/>
+            <a:srgbClr val="1E3C72"/>
           </a:solidFill>
           <a:ln>
             <a:noFill/>
@@ -3412,8 +3414,8 @@
         </p:nvSpPr>
         <p:spPr>
           <a:xfrm>
-            <a:off x="457200" y="228600"/>
-            <a:ext cx="8229600" cy="640080"/>
+            <a:off x="548640" y="274320"/>
+            <a:ext cx="8229600" cy="731520"/>
           </a:xfrm>
           <a:prstGeom prst="rect">
             <a:avLst/>
@@ -3427,14 +3429,14 @@
           <a:lstStyle/>
           <a:p>
             <a:pPr>
-              <a:defRPr sz="2800" b="1">
+              <a:defRPr sz="3000" b="1">
                 <a:solidFill>
                   <a:srgbClr val="FFFFFF"/>
                 </a:solidFill>
               </a:defRPr>
             </a:pPr>
             <a:r>
-              <a:t>📌 现代应用</a:t>
+              <a:t>第七十八章 · 逐句释义</a:t>
             </a:r>
           </a:p>
         </p:txBody>
@@ -3447,14 +3449,14 @@
         </p:nvSpPr>
         <p:spPr>
           <a:xfrm>
-            <a:off x="457200" y="2377440"/>
-            <a:ext cx="8229600" cy="914400"/>
+            <a:off x="457200" y="1371600"/>
+            <a:ext cx="8229600" cy="1143000"/>
           </a:xfrm>
           <a:prstGeom prst="roundRect">
             <a:avLst/>
           </a:prstGeom>
           <a:solidFill>
-            <a:srgbClr val="F2F6FA"/>
+            <a:srgbClr val="F5F7FA"/>
           </a:solidFill>
         </p:spPr>
         <p:style>
@@ -3476,26 +3478,29 @@
           <a:lstStyle/>
           <a:p>
             <a:pPr algn="ctr">
-              <a:defRPr sz="1400" b="1">
-                <a:solidFill>
-                  <a:srgbClr val="00529B"/>
-                </a:solidFill>
-              </a:defRPr>
-            </a:pPr>
-            <a:r>
-              <a:t>自我成长</a:t>
-            </a:r>
-          </a:p>
-          <a:p>
-            <a:pPr>
-              <a:defRPr sz="1200">
+              <a:defRPr sz="1700" b="1">
+                <a:solidFill>
+                  <a:srgbClr val="1E3C72"/>
+                </a:solidFill>
+              </a:defRPr>
+            </a:pPr>
+            <a:r>
+              <a:t>① 天下莫柔弱于水，而攻坚强者莫之能胜</a:t>
+            </a:r>
+          </a:p>
+          <a:p>
+            <a:pPr>
+              <a:spcBef>
+                <a:spcPts val="400"/>
+              </a:spcBef>
+              <a:defRPr sz="1500">
                 <a:solidFill>
                   <a:srgbClr val="333333"/>
                 </a:solidFill>
               </a:defRPr>
             </a:pPr>
             <a:r>
-              <a:t>勇于不敢则活 → 学会在适当时候退让，比盲目进取更重要。</a:t>
+              <a:t>天下最柔弱的是水，但攻坚克强没有能胜过水的——水是柔弱胜刚强的最好例证。</a:t>
             </a:r>
           </a:p>
         </p:txBody>
@@ -3508,14 +3513,14 @@
         </p:nvSpPr>
         <p:spPr>
           <a:xfrm>
-            <a:off x="457200" y="3383280"/>
-            <a:ext cx="8229600" cy="914400"/>
+            <a:off x="457200" y="2606040"/>
+            <a:ext cx="8229600" cy="1143000"/>
           </a:xfrm>
           <a:prstGeom prst="roundRect">
             <a:avLst/>
           </a:prstGeom>
           <a:solidFill>
-            <a:srgbClr val="F2F6FA"/>
+            <a:srgbClr val="F5F7FA"/>
           </a:solidFill>
         </p:spPr>
         <p:style>
@@ -3537,26 +3542,29 @@
           <a:lstStyle/>
           <a:p>
             <a:pPr algn="ctr">
-              <a:defRPr sz="1400" b="1">
-                <a:solidFill>
-                  <a:srgbClr val="00529B"/>
-                </a:solidFill>
-              </a:defRPr>
-            </a:pPr>
-            <a:r>
-              <a:t>职场智慧</a:t>
-            </a:r>
-          </a:p>
-          <a:p>
-            <a:pPr>
-              <a:defRPr sz="1200">
+              <a:defRPr sz="1700" b="1">
+                <a:solidFill>
+                  <a:srgbClr val="1E3C72"/>
+                </a:solidFill>
+              </a:defRPr>
+            </a:pPr>
+            <a:r>
+              <a:t>② 知其雄，守其雌</a:t>
+            </a:r>
+          </a:p>
+          <a:p>
+            <a:pPr>
+              <a:spcBef>
+                <a:spcPts val="400"/>
+              </a:spcBef>
+              <a:defRPr sz="1500">
                 <a:solidFill>
                   <a:srgbClr val="333333"/>
                 </a:solidFill>
               </a:defRPr>
             </a:pPr>
             <a:r>
-              <a:t>不争而善胜 → 通过合作而非竞争，往往能取得更大成就。</a:t>
+              <a:t>知道什么是雄强，却甘愿处于雌柔——明知自己有能力，却选择谦下，这是最高的德行。</a:t>
             </a:r>
           </a:p>
         </p:txBody>
@@ -3569,14 +3577,14 @@
         </p:nvSpPr>
         <p:spPr>
           <a:xfrm>
-            <a:off x="457200" y="4389120"/>
-            <a:ext cx="8229600" cy="914400"/>
+            <a:off x="457200" y="3840480"/>
+            <a:ext cx="8229600" cy="1143000"/>
           </a:xfrm>
           <a:prstGeom prst="roundRect">
             <a:avLst/>
           </a:prstGeom>
           <a:solidFill>
-            <a:srgbClr val="F2F6FA"/>
+            <a:srgbClr val="F5F7FA"/>
           </a:solidFill>
         </p:spPr>
         <p:style>
@@ -3598,26 +3606,29 @@
           <a:lstStyle/>
           <a:p>
             <a:pPr algn="ctr">
-              <a:defRPr sz="1400" b="1">
-                <a:solidFill>
-                  <a:srgbClr val="00529B"/>
-                </a:solidFill>
-              </a:defRPr>
-            </a:pPr>
-            <a:r>
-              <a:t>治国理政</a:t>
-            </a:r>
-          </a:p>
-          <a:p>
-            <a:pPr>
-              <a:defRPr sz="1200">
+              <a:defRPr sz="1700" b="1">
+                <a:solidFill>
+                  <a:srgbClr val="1E3C72"/>
+                </a:solidFill>
+              </a:defRPr>
+            </a:pPr>
+            <a:r>
+              <a:t>③ 复归于婴儿，复归于朴</a:t>
+            </a:r>
+          </a:p>
+          <a:p>
+            <a:pPr>
+              <a:spcBef>
+                <a:spcPts val="400"/>
+              </a:spcBef>
+              <a:defRPr sz="1500">
                 <a:solidFill>
                   <a:srgbClr val="333333"/>
                 </a:solidFill>
               </a:defRPr>
             </a:pPr>
             <a:r>
-              <a:t>无为而治 → 政府减少过度干预，让市场和社会自然运转。</a:t>
+              <a:t>回归到婴儿般的纯真，回归到道的本源——返璞归真，复归自然，是人生的最高境界。</a:t>
             </a:r>
           </a:p>
         </p:txBody>
@@ -3630,14 +3641,14 @@
         </p:nvSpPr>
         <p:spPr>
           <a:xfrm>
-            <a:off x="457200" y="5394960"/>
-            <a:ext cx="8229600" cy="914400"/>
+            <a:off x="457200" y="5074920"/>
+            <a:ext cx="8229600" cy="1143000"/>
           </a:xfrm>
           <a:prstGeom prst="roundRect">
             <a:avLst/>
           </a:prstGeom>
           <a:solidFill>
-            <a:srgbClr val="F2F6FA"/>
+            <a:srgbClr val="F5F7FA"/>
           </a:solidFill>
         </p:spPr>
         <p:style>
@@ -3659,26 +3670,29 @@
           <a:lstStyle/>
           <a:p>
             <a:pPr algn="ctr">
-              <a:defRPr sz="1400" b="1">
-                <a:solidFill>
-                  <a:srgbClr val="00529B"/>
-                </a:solidFill>
-              </a:defRPr>
-            </a:pPr>
-            <a:r>
-              <a:t>人生境界</a:t>
-            </a:r>
-          </a:p>
-          <a:p>
-            <a:pPr>
-              <a:defRPr sz="1200">
+              <a:defRPr sz="1700" b="1">
+                <a:solidFill>
+                  <a:srgbClr val="1E3C72"/>
+                </a:solidFill>
+              </a:defRPr>
+            </a:pPr>
+            <a:r>
+              <a:t>④ 为而不争，天之道也</a:t>
+            </a:r>
+          </a:p>
+          <a:p>
+            <a:pPr>
+              <a:spcBef>
+                <a:spcPts val="400"/>
+              </a:spcBef>
+              <a:defRPr sz="1500">
                 <a:solidFill>
                   <a:srgbClr val="333333"/>
                 </a:solidFill>
               </a:defRPr>
             </a:pPr>
             <a:r>
-              <a:t>贤于贵生 → 不被物质欲望束缚，精神自由才是真正的富足。</a:t>
+              <a:t>有所作为但不与人争夺，这是自然的法则——做该做的事，但不争功、不争利。</a:t>
             </a:r>
           </a:p>
         </p:txBody>
@@ -3691,8 +3705,8 @@
         </p:nvSpPr>
         <p:spPr>
           <a:xfrm>
-            <a:off x="8503920" y="6492240"/>
-            <a:ext cx="457200" cy="274320"/>
+            <a:off x="8229600" y="6492240"/>
+            <a:ext cx="731520" cy="274320"/>
           </a:xfrm>
           <a:prstGeom prst="rect">
             <a:avLst/>
@@ -3706,14 +3720,14 @@
           <a:lstStyle/>
           <a:p>
             <a:pPr algn="r">
-              <a:defRPr sz="1000">
+              <a:defRPr sz="1200">
                 <a:solidFill>
                   <a:srgbClr val="969696"/>
                 </a:solidFill>
               </a:defRPr>
             </a:pPr>
             <a:r>
-              <a:t>10/12</a:t>
+              <a:t>10/14</a:t>
             </a:r>
           </a:p>
         </p:txBody>
@@ -3745,13 +3759,13 @@
         <p:spPr>
           <a:xfrm>
             <a:off x="0" y="0"/>
-            <a:ext cx="9144000" cy="1005840"/>
+            <a:ext cx="9144000" cy="1188720"/>
           </a:xfrm>
           <a:prstGeom prst="rect">
             <a:avLst/>
           </a:prstGeom>
           <a:solidFill>
-            <a:srgbClr val="00529B"/>
+            <a:srgbClr val="1E3C72"/>
           </a:solidFill>
           <a:ln>
             <a:noFill/>
@@ -3787,8 +3801,8 @@
         </p:nvSpPr>
         <p:spPr>
           <a:xfrm>
-            <a:off x="457200" y="228600"/>
-            <a:ext cx="8229600" cy="640080"/>
+            <a:off x="548640" y="274320"/>
+            <a:ext cx="8229600" cy="731520"/>
           </a:xfrm>
           <a:prstGeom prst="rect">
             <a:avLst/>
@@ -3802,14 +3816,14 @@
           <a:lstStyle/>
           <a:p>
             <a:pPr>
-              <a:defRPr sz="2800" b="1">
+              <a:defRPr sz="3000" b="1">
                 <a:solidFill>
                   <a:srgbClr val="FFFFFF"/>
                 </a:solidFill>
               </a:defRPr>
             </a:pPr>
             <a:r>
-              <a:t>📜 中国典故：萧规曹随</a:t>
+              <a:t>第七十八章 · 本章小结</a:t>
             </a:r>
           </a:p>
         </p:txBody>
@@ -3822,14 +3836,14 @@
         </p:nvSpPr>
         <p:spPr>
           <a:xfrm>
-            <a:off x="457200" y="1280160"/>
-            <a:ext cx="8229600" cy="2286000"/>
+            <a:off x="457200" y="1371600"/>
+            <a:ext cx="8229600" cy="1280160"/>
           </a:xfrm>
           <a:prstGeom prst="roundRect">
             <a:avLst/>
           </a:prstGeom>
           <a:solidFill>
-            <a:srgbClr val="F2F6FA"/>
+            <a:srgbClr val="4682B4"/>
           </a:solidFill>
         </p:spPr>
         <p:style>
@@ -3851,29 +3865,26 @@
           <a:lstStyle/>
           <a:p>
             <a:pPr algn="ctr">
-              <a:defRPr sz="1600" b="1">
-                <a:solidFill>
-                  <a:srgbClr val="00529B"/>
-                </a:solidFill>
-              </a:defRPr>
-            </a:pPr>
-            <a:r>
-              <a:t>【史记·曹相国世家】</a:t>
-            </a:r>
-          </a:p>
-          <a:p>
-            <a:pPr>
-              <a:spcBef>
-                <a:spcPts val="1000"/>
-              </a:spcBef>
+              <a:defRPr sz="1800" b="1">
+                <a:solidFill>
+                  <a:srgbClr val="FFFFFF"/>
+                </a:solidFill>
+              </a:defRPr>
+            </a:pPr>
+            <a:r>
+              <a:t>🌟 核心观点</a:t>
+            </a:r>
+          </a:p>
+          <a:p>
+            <a:pPr>
               <a:defRPr sz="1500">
                 <a:solidFill>
-                  <a:srgbClr val="333333"/>
-                </a:solidFill>
-              </a:defRPr>
-            </a:pPr>
-            <a:r>
-              <a:t>曹参继萧何为相国，所有法令都不改变，只是一切遵循萧何的规定。他日夜饮酒，无所事事。有人想劝他，他就请人喝酒，直到那人醉倒。惠帝责怪曹参不治国。曹参问：陛下与高帝谁更圣明？惠帝说：我怎敢与先帝相比。曹参说：我与萧何谁更贤能？惠帝说：你似乎不如萧何。曹参说：高帝与萧何安定天下，法令已经明确，陛下垂拱而治，我等遵循法令，不就行了吗？</a:t>
+                  <a:srgbClr val="FFFFFF"/>
+                </a:solidFill>
+              </a:defRPr>
+            </a:pPr>
+            <a:r>
+              <a:t>为而不争——做该做的事，但不强求结果，不与人争。这是天之道，也是最高明的处世之道。</a:t>
             </a:r>
           </a:p>
         </p:txBody>
@@ -3886,14 +3897,14 @@
         </p:nvSpPr>
         <p:spPr>
           <a:xfrm>
-            <a:off x="457200" y="3749039"/>
-            <a:ext cx="8229600" cy="914400"/>
+            <a:off x="457200" y="2834640"/>
+            <a:ext cx="8229600" cy="1143000"/>
           </a:xfrm>
           <a:prstGeom prst="roundRect">
             <a:avLst/>
           </a:prstGeom>
           <a:solidFill>
-            <a:srgbClr val="007AC2"/>
+            <a:srgbClr val="F5F7FA"/>
           </a:solidFill>
         </p:spPr>
         <p:style>
@@ -3915,40 +3926,235 @@
           <a:lstStyle/>
           <a:p>
             <a:pPr algn="ctr">
-              <a:defRPr sz="1800" b="1">
-                <a:solidFill>
-                  <a:srgbClr val="FFFFFF"/>
-                </a:solidFill>
-              </a:defRPr>
-            </a:pPr>
-            <a:r>
-              <a:t>💡 启示</a:t>
-            </a:r>
-          </a:p>
-          <a:p>
-            <a:pPr>
-              <a:defRPr sz="1400">
-                <a:solidFill>
-                  <a:srgbClr val="FFFFFF"/>
-                </a:solidFill>
-              </a:defRPr>
-            </a:pPr>
-            <a:r>
-              <a:t>萧规曹随——无为而治的典范。不胡乱作为，遵循既定良法，让社会自然运转，这才是真正的治国智慧。</a:t>
-            </a:r>
-          </a:p>
-        </p:txBody>
-      </p:sp>
-      <p:sp>
-        <p:nvSpPr>
-          <p:cNvPr id="6" name="TextBox 5"/>
+              <a:defRPr sz="1700" b="1">
+                <a:solidFill>
+                  <a:srgbClr val="1E3C72"/>
+                </a:solidFill>
+              </a:defRPr>
+            </a:pPr>
+            <a:r>
+              <a:t>1. 柔弱胜刚强</a:t>
+            </a:r>
+          </a:p>
+          <a:p>
+            <a:pPr>
+              <a:spcBef>
+                <a:spcPts val="400"/>
+              </a:spcBef>
+              <a:defRPr sz="1500">
+                <a:solidFill>
+                  <a:srgbClr val="333333"/>
+                </a:solidFill>
+              </a:defRPr>
+            </a:pPr>
+            <a:r>
+              <a:t>水虽柔弱却无坚不摧——柔弱不是无能，而是最强大的力量。</a:t>
+            </a:r>
+          </a:p>
+        </p:txBody>
+      </p:sp>
+      <p:sp>
+        <p:nvSpPr>
+          <p:cNvPr id="6" name="Rounded Rectangle 5"/>
+          <p:cNvSpPr/>
+          <p:nvPr/>
+        </p:nvSpPr>
+        <p:spPr>
+          <a:xfrm>
+            <a:off x="457200" y="4069080"/>
+            <a:ext cx="8229600" cy="1143000"/>
+          </a:xfrm>
+          <a:prstGeom prst="roundRect">
+            <a:avLst/>
+          </a:prstGeom>
+          <a:solidFill>
+            <a:srgbClr val="F5F7FA"/>
+          </a:solidFill>
+        </p:spPr>
+        <p:style>
+          <a:lnRef idx="1">
+            <a:schemeClr val="accent1"/>
+          </a:lnRef>
+          <a:fillRef idx="3">
+            <a:schemeClr val="accent1"/>
+          </a:fillRef>
+          <a:effectRef idx="2">
+            <a:schemeClr val="accent1"/>
+          </a:effectRef>
+          <a:fontRef idx="minor">
+            <a:schemeClr val="lt1"/>
+          </a:fontRef>
+        </p:style>
+        <p:txBody>
+          <a:bodyPr rtlCol="0" anchor="ctr" wrap="square"/>
+          <a:lstStyle/>
+          <a:p>
+            <a:pPr algn="ctr">
+              <a:defRPr sz="1700" b="1">
+                <a:solidFill>
+                  <a:srgbClr val="1E3C72"/>
+                </a:solidFill>
+              </a:defRPr>
+            </a:pPr>
+            <a:r>
+              <a:t>2. 知雄守雌</a:t>
+            </a:r>
+          </a:p>
+          <a:p>
+            <a:pPr>
+              <a:spcBef>
+                <a:spcPts val="400"/>
+              </a:spcBef>
+              <a:defRPr sz="1500">
+                <a:solidFill>
+                  <a:srgbClr val="333333"/>
+                </a:solidFill>
+              </a:defRPr>
+            </a:pPr>
+            <a:r>
+              <a:t>知道自己的优势，却甘愿谦下——这是一种深层的智慧和修养。</a:t>
+            </a:r>
+          </a:p>
+        </p:txBody>
+      </p:sp>
+      <p:sp>
+        <p:nvSpPr>
+          <p:cNvPr id="7" name="Rounded Rectangle 6"/>
+          <p:cNvSpPr/>
+          <p:nvPr/>
+        </p:nvSpPr>
+        <p:spPr>
+          <a:xfrm>
+            <a:off x="457200" y="5303520"/>
+            <a:ext cx="8229600" cy="1143000"/>
+          </a:xfrm>
+          <a:prstGeom prst="roundRect">
+            <a:avLst/>
+          </a:prstGeom>
+          <a:solidFill>
+            <a:srgbClr val="F5F7FA"/>
+          </a:solidFill>
+        </p:spPr>
+        <p:style>
+          <a:lnRef idx="1">
+            <a:schemeClr val="accent1"/>
+          </a:lnRef>
+          <a:fillRef idx="3">
+            <a:schemeClr val="accent1"/>
+          </a:fillRef>
+          <a:effectRef idx="2">
+            <a:schemeClr val="accent1"/>
+          </a:effectRef>
+          <a:fontRef idx="minor">
+            <a:schemeClr val="lt1"/>
+          </a:fontRef>
+        </p:style>
+        <p:txBody>
+          <a:bodyPr rtlCol="0" anchor="ctr" wrap="square"/>
+          <a:lstStyle/>
+          <a:p>
+            <a:pPr algn="ctr">
+              <a:defRPr sz="1700" b="1">
+                <a:solidFill>
+                  <a:srgbClr val="1E3C72"/>
+                </a:solidFill>
+              </a:defRPr>
+            </a:pPr>
+            <a:r>
+              <a:t>3. 复归于朴</a:t>
+            </a:r>
+          </a:p>
+          <a:p>
+            <a:pPr>
+              <a:spcBef>
+                <a:spcPts val="400"/>
+              </a:spcBef>
+              <a:defRPr sz="1500">
+                <a:solidFill>
+                  <a:srgbClr val="333333"/>
+                </a:solidFill>
+              </a:defRPr>
+            </a:pPr>
+            <a:r>
+              <a:t>回归本真、返璞归真——不被世俗所染，保持内心的纯朴。</a:t>
+            </a:r>
+          </a:p>
+        </p:txBody>
+      </p:sp>
+      <p:sp>
+        <p:nvSpPr>
+          <p:cNvPr id="8" name="Rounded Rectangle 7"/>
+          <p:cNvSpPr/>
+          <p:nvPr/>
+        </p:nvSpPr>
+        <p:spPr>
+          <a:xfrm>
+            <a:off x="457200" y="6537960"/>
+            <a:ext cx="8229600" cy="1143000"/>
+          </a:xfrm>
+          <a:prstGeom prst="roundRect">
+            <a:avLst/>
+          </a:prstGeom>
+          <a:solidFill>
+            <a:srgbClr val="F5F7FA"/>
+          </a:solidFill>
+        </p:spPr>
+        <p:style>
+          <a:lnRef idx="1">
+            <a:schemeClr val="accent1"/>
+          </a:lnRef>
+          <a:fillRef idx="3">
+            <a:schemeClr val="accent1"/>
+          </a:fillRef>
+          <a:effectRef idx="2">
+            <a:schemeClr val="accent1"/>
+          </a:effectRef>
+          <a:fontRef idx="minor">
+            <a:schemeClr val="lt1"/>
+          </a:fontRef>
+        </p:style>
+        <p:txBody>
+          <a:bodyPr rtlCol="0" anchor="ctr" wrap="square"/>
+          <a:lstStyle/>
+          <a:p>
+            <a:pPr algn="ctr">
+              <a:defRPr sz="1700" b="1">
+                <a:solidFill>
+                  <a:srgbClr val="1E3C72"/>
+                </a:solidFill>
+              </a:defRPr>
+            </a:pPr>
+            <a:r>
+              <a:t>4. 为而不争</a:t>
+            </a:r>
+          </a:p>
+          <a:p>
+            <a:pPr>
+              <a:spcBef>
+                <a:spcPts val="400"/>
+              </a:spcBef>
+              <a:defRPr sz="1500">
+                <a:solidFill>
+                  <a:srgbClr val="333333"/>
+                </a:solidFill>
+              </a:defRPr>
+            </a:pPr>
+            <a:r>
+              <a:t>做事情但不争抢——天之道是利万物而不争，人的最高境界也是为而不争。</a:t>
+            </a:r>
+          </a:p>
+        </p:txBody>
+      </p:sp>
+      <p:sp>
+        <p:nvSpPr>
+          <p:cNvPr id="9" name="TextBox 8"/>
           <p:cNvSpPr txBox="1"/>
           <p:nvPr/>
         </p:nvSpPr>
         <p:spPr>
           <a:xfrm>
-            <a:off x="8503920" y="6492240"/>
-            <a:ext cx="457200" cy="274320"/>
+            <a:off x="8229600" y="6492240"/>
+            <a:ext cx="731520" cy="274320"/>
           </a:xfrm>
           <a:prstGeom prst="rect">
             <a:avLst/>
@@ -3962,14 +4168,14 @@
           <a:lstStyle/>
           <a:p>
             <a:pPr algn="r">
-              <a:defRPr sz="1000">
+              <a:defRPr sz="1200">
                 <a:solidFill>
                   <a:srgbClr val="969696"/>
                 </a:solidFill>
               </a:defRPr>
             </a:pPr>
             <a:r>
-              <a:t>11/12</a:t>
+              <a:t>11/14</a:t>
             </a:r>
           </a:p>
         </p:txBody>
@@ -4001,13 +4207,13 @@
         <p:spPr>
           <a:xfrm>
             <a:off x="0" y="0"/>
-            <a:ext cx="9144000" cy="1005840"/>
+            <a:ext cx="9144000" cy="1188720"/>
           </a:xfrm>
           <a:prstGeom prst="rect">
             <a:avLst/>
           </a:prstGeom>
           <a:solidFill>
-            <a:srgbClr val="00529B"/>
+            <a:srgbClr val="1E3C72"/>
           </a:solidFill>
           <a:ln>
             <a:noFill/>
@@ -4043,8 +4249,8 @@
         </p:nvSpPr>
         <p:spPr>
           <a:xfrm>
-            <a:off x="457200" y="228600"/>
-            <a:ext cx="8229600" cy="640080"/>
+            <a:off x="548640" y="274320"/>
+            <a:ext cx="8229600" cy="731520"/>
           </a:xfrm>
           <a:prstGeom prst="rect">
             <a:avLst/>
@@ -4058,14 +4264,14 @@
           <a:lstStyle/>
           <a:p>
             <a:pPr>
-              <a:defRPr sz="2800" b="1">
+              <a:defRPr sz="3000" b="1">
                 <a:solidFill>
                   <a:srgbClr val="FFFFFF"/>
                 </a:solidFill>
               </a:defRPr>
             </a:pPr>
             <a:r>
-              <a:t>第24课 · 三章精华总结</a:t>
+              <a:t>三章精华 · 一以贯之</a:t>
             </a:r>
           </a:p>
         </p:txBody>
@@ -4078,14 +4284,14 @@
         </p:nvSpPr>
         <p:spPr>
           <a:xfrm>
-            <a:off x="457200" y="1280160"/>
-            <a:ext cx="8229600" cy="1371600"/>
+            <a:off x="457200" y="1371600"/>
+            <a:ext cx="8229600" cy="1417320"/>
           </a:xfrm>
           <a:prstGeom prst="roundRect">
             <a:avLst/>
           </a:prstGeom>
           <a:solidFill>
-            <a:srgbClr val="F2F6FA"/>
+            <a:srgbClr val="F5F7FA"/>
           </a:solidFill>
         </p:spPr>
         <p:style>
@@ -4109,16 +4315,19 @@
             <a:pPr algn="ctr">
               <a:defRPr sz="1800" b="1">
                 <a:solidFill>
-                  <a:srgbClr val="00529B"/>
-                </a:solidFill>
-              </a:defRPr>
-            </a:pPr>
-            <a:r>
-              <a:t>📖 第七十三章：勇于敢</a:t>
-            </a:r>
-          </a:p>
-          <a:p>
-            <a:pPr>
+                  <a:srgbClr val="1E3C72"/>
+                </a:solidFill>
+              </a:defRPr>
+            </a:pPr>
+            <a:r>
+              <a:t>📖 第七十六章：出生入死</a:t>
+            </a:r>
+          </a:p>
+          <a:p>
+            <a:pPr>
+              <a:spcBef>
+                <a:spcPts val="500"/>
+              </a:spcBef>
               <a:defRPr sz="1500">
                 <a:solidFill>
                   <a:srgbClr val="333333"/>
@@ -4126,7 +4335,7 @@
               </a:defRPr>
             </a:pPr>
             <a:r>
-              <a:t>勇于敢则杀，勇于不敢则活。天网恢恢，疏而不失。</a:t>
+              <a:t>柔弱生之徒，坚强死之徒。强大处下，柔弱处上。生命的力量在于柔韧而非强硬。</a:t>
             </a:r>
           </a:p>
         </p:txBody>
@@ -4139,14 +4348,14 @@
         </p:nvSpPr>
         <p:spPr>
           <a:xfrm>
-            <a:off x="457200" y="2743200"/>
-            <a:ext cx="8229600" cy="1371600"/>
+            <a:off x="457200" y="2880360"/>
+            <a:ext cx="8229600" cy="1417320"/>
           </a:xfrm>
           <a:prstGeom prst="roundRect">
             <a:avLst/>
           </a:prstGeom>
           <a:solidFill>
-            <a:srgbClr val="F2F6FA"/>
+            <a:srgbClr val="F5F7FA"/>
           </a:solidFill>
         </p:spPr>
         <p:style>
@@ -4170,16 +4379,19 @@
             <a:pPr algn="ctr">
               <a:defRPr sz="1800" b="1">
                 <a:solidFill>
-                  <a:srgbClr val="00529B"/>
-                </a:solidFill>
-              </a:defRPr>
-            </a:pPr>
-            <a:r>
-              <a:t>📖 第七十四章：民不畏死</a:t>
-            </a:r>
-          </a:p>
-          <a:p>
-            <a:pPr>
+                  <a:srgbClr val="1E3C72"/>
+                </a:solidFill>
+              </a:defRPr>
+            </a:pPr>
+            <a:r>
+              <a:t>📖 第七十七章：柔弱处上</a:t>
+            </a:r>
+          </a:p>
+          <a:p>
+            <a:pPr>
+              <a:spcBef>
+                <a:spcPts val="500"/>
+              </a:spcBef>
               <a:defRPr sz="1500">
                 <a:solidFill>
                   <a:srgbClr val="333333"/>
@@ -4187,7 +4399,7 @@
               </a:defRPr>
             </a:pPr>
             <a:r>
-              <a:t>民不畏死，奈何以死惧之？代司杀者杀，希有不伤其手。</a:t>
+              <a:t>天下之至柔，驰骋天下之至坚。无有入无间。柔弱胜刚强，道之奥义。</a:t>
             </a:r>
           </a:p>
         </p:txBody>
@@ -4200,14 +4412,14 @@
         </p:nvSpPr>
         <p:spPr>
           <a:xfrm>
-            <a:off x="457200" y="4206240"/>
-            <a:ext cx="8229600" cy="1371600"/>
+            <a:off x="457200" y="4389120"/>
+            <a:ext cx="8229600" cy="1417320"/>
           </a:xfrm>
           <a:prstGeom prst="roundRect">
             <a:avLst/>
           </a:prstGeom>
           <a:solidFill>
-            <a:srgbClr val="F2F6FA"/>
+            <a:srgbClr val="F5F7FA"/>
           </a:solidFill>
         </p:spPr>
         <p:style>
@@ -4231,16 +4443,19 @@
             <a:pPr algn="ctr">
               <a:defRPr sz="1800" b="1">
                 <a:solidFill>
-                  <a:srgbClr val="00529B"/>
-                </a:solidFill>
-              </a:defRPr>
-            </a:pPr>
-            <a:r>
-              <a:t>📖 第七十五章：民之饥</a:t>
-            </a:r>
-          </a:p>
-          <a:p>
-            <a:pPr>
+                  <a:srgbClr val="1E3C72"/>
+                </a:solidFill>
+              </a:defRPr>
+            </a:pPr>
+            <a:r>
+              <a:t>📖 第七十八章：为而不争</a:t>
+            </a:r>
+          </a:p>
+          <a:p>
+            <a:pPr>
+              <a:spcBef>
+                <a:spcPts val="500"/>
+              </a:spcBef>
               <a:defRPr sz="1500">
                 <a:solidFill>
                   <a:srgbClr val="333333"/>
@@ -4248,28 +4463,84 @@
               </a:defRPr>
             </a:pPr>
             <a:r>
-              <a:t>以其上食税之多，是以饥。无以生为者，贤于贵生。</a:t>
-            </a:r>
-          </a:p>
-        </p:txBody>
-      </p:sp>
-      <p:sp>
-        <p:nvSpPr>
-          <p:cNvPr id="7" name="Rounded Rectangle 6"/>
+              <a:t>知其雄，守其雌，复归于朴。为而不争，天之道也——最高明的处世之道。</a:t>
+            </a:r>
+          </a:p>
+        </p:txBody>
+      </p:sp>
+      <p:sp>
+        <p:nvSpPr>
+          <p:cNvPr id="7" name="TextBox 6"/>
+          <p:cNvSpPr txBox="1"/>
+          <p:nvPr/>
+        </p:nvSpPr>
+        <p:spPr>
+          <a:xfrm>
+            <a:off x="8229600" y="6492240"/>
+            <a:ext cx="731520" cy="274320"/>
+          </a:xfrm>
+          <a:prstGeom prst="rect">
+            <a:avLst/>
+          </a:prstGeom>
+          <a:noFill/>
+        </p:spPr>
+        <p:txBody>
+          <a:bodyPr wrap="none">
+            <a:spAutoFit/>
+          </a:bodyPr>
+          <a:lstStyle/>
+          <a:p>
+            <a:pPr algn="r">
+              <a:defRPr sz="1200">
+                <a:solidFill>
+                  <a:srgbClr val="969696"/>
+                </a:solidFill>
+              </a:defRPr>
+            </a:pPr>
+            <a:r>
+              <a:t>12/14</a:t>
+            </a:r>
+          </a:p>
+        </p:txBody>
+      </p:sp>
+    </p:spTree>
+  </p:cSld>
+  <p:clrMapOvr>
+    <a:masterClrMapping/>
+  </p:clrMapOvr>
+</p:sld>
+</file>
+
+<file path=ppt/slides/slide13.xml><?xml version="1.0" encoding="utf-8"?>
+<p:sld xmlns:a="http://schemas.openxmlformats.org/drawingml/2006/main" xmlns:p="http://schemas.openxmlformats.org/presentationml/2006/main" xmlns:r="http://schemas.openxmlformats.org/officeDocument/2006/relationships">
+  <p:cSld>
+    <p:spTree>
+      <p:nvGrpSpPr>
+        <p:cNvPr id="1" name=""/>
+        <p:cNvGrpSpPr/>
+        <p:nvPr/>
+      </p:nvGrpSpPr>
+      <p:grpSpPr/>
+      <p:sp>
+        <p:nvSpPr>
+          <p:cNvPr id="2" name="Rectangle 1"/>
           <p:cNvSpPr/>
           <p:nvPr/>
         </p:nvSpPr>
         <p:spPr>
           <a:xfrm>
-            <a:off x="457200" y="5486400"/>
-            <a:ext cx="8229600" cy="914400"/>
-          </a:xfrm>
-          <a:prstGeom prst="roundRect">
+            <a:off x="0" y="0"/>
+            <a:ext cx="9144000" cy="1188720"/>
+          </a:xfrm>
+          <a:prstGeom prst="rect">
             <a:avLst/>
           </a:prstGeom>
           <a:solidFill>
-            <a:srgbClr val="00529B"/>
+            <a:srgbClr val="1E3C72"/>
           </a:solidFill>
+          <a:ln>
+            <a:noFill/>
+          </a:ln>
         </p:spPr>
         <p:style>
           <a:lnRef idx="1">
@@ -4286,44 +4557,23 @@
           </a:fontRef>
         </p:style>
         <p:txBody>
-          <a:bodyPr rtlCol="0" anchor="ctr" wrap="square"/>
-          <a:lstStyle/>
-          <a:p>
-            <a:pPr algn="ctr">
-              <a:defRPr sz="2000" b="1">
-                <a:solidFill>
-                  <a:srgbClr val="FFFFFF"/>
-                </a:solidFill>
-              </a:defRPr>
-            </a:pPr>
-            <a:r>
-              <a:t>天网恢恢，疏而不失。</a:t>
-            </a:r>
-          </a:p>
-          <a:p>
-            <a:pPr algn="ctr">
-              <a:defRPr sz="1400">
-                <a:solidFill>
-                  <a:srgbClr val="C8C8C8"/>
-                </a:solidFill>
-              </a:defRPr>
-            </a:pPr>
-            <a:r>
-              <a:t>—— 道德经第七十三章</a:t>
-            </a:r>
-          </a:p>
-        </p:txBody>
-      </p:sp>
-      <p:sp>
-        <p:nvSpPr>
-          <p:cNvPr id="8" name="TextBox 7"/>
+          <a:bodyPr rtlCol="0" anchor="ctr"/>
+          <a:lstStyle/>
+          <a:p>
+            <a:pPr algn="ctr"/>
+          </a:p>
+        </p:txBody>
+      </p:sp>
+      <p:sp>
+        <p:nvSpPr>
+          <p:cNvPr id="3" name="TextBox 2"/>
           <p:cNvSpPr txBox="1"/>
           <p:nvPr/>
         </p:nvSpPr>
         <p:spPr>
           <a:xfrm>
-            <a:off x="8503920" y="6492240"/>
-            <a:ext cx="457200" cy="274320"/>
+            <a:off x="548640" y="274320"/>
+            <a:ext cx="8229600" cy="731520"/>
           </a:xfrm>
           <a:prstGeom prst="rect">
             <a:avLst/>
@@ -4336,15 +4586,627 @@
           </a:bodyPr>
           <a:lstStyle/>
           <a:p>
+            <a:pPr>
+              <a:defRPr sz="3000" b="1">
+                <a:solidFill>
+                  <a:srgbClr val="FFFFFF"/>
+                </a:solidFill>
+              </a:defRPr>
+            </a:pPr>
+            <a:r>
+              <a:t>📌 现代应用</a:t>
+            </a:r>
+          </a:p>
+        </p:txBody>
+      </p:sp>
+      <p:sp>
+        <p:nvSpPr>
+          <p:cNvPr id="4" name="Rounded Rectangle 3"/>
+          <p:cNvSpPr/>
+          <p:nvPr/>
+        </p:nvSpPr>
+        <p:spPr>
+          <a:xfrm>
+            <a:off x="457200" y="1371600"/>
+            <a:ext cx="8229600" cy="1143000"/>
+          </a:xfrm>
+          <a:prstGeom prst="roundRect">
+            <a:avLst/>
+          </a:prstGeom>
+          <a:solidFill>
+            <a:srgbClr val="F5F7FA"/>
+          </a:solidFill>
+        </p:spPr>
+        <p:style>
+          <a:lnRef idx="1">
+            <a:schemeClr val="accent1"/>
+          </a:lnRef>
+          <a:fillRef idx="3">
+            <a:schemeClr val="accent1"/>
+          </a:fillRef>
+          <a:effectRef idx="2">
+            <a:schemeClr val="accent1"/>
+          </a:effectRef>
+          <a:fontRef idx="minor">
+            <a:schemeClr val="lt1"/>
+          </a:fontRef>
+        </p:style>
+        <p:txBody>
+          <a:bodyPr rtlCol="0" anchor="ctr" wrap="square"/>
+          <a:lstStyle/>
+          <a:p>
+            <a:pPr algn="ctr">
+              <a:defRPr sz="1700" b="1">
+                <a:solidFill>
+                  <a:srgbClr val="1E3C72"/>
+                </a:solidFill>
+              </a:defRPr>
+            </a:pPr>
+            <a:r>
+              <a:t>🏋️ 健身与健康</a:t>
+            </a:r>
+          </a:p>
+          <a:p>
+            <a:pPr>
+              <a:spcBef>
+                <a:spcPts val="400"/>
+              </a:spcBef>
+              <a:defRPr sz="1500">
+                <a:solidFill>
+                  <a:srgbClr val="333333"/>
+                </a:solidFill>
+              </a:defRPr>
+            </a:pPr>
+            <a:r>
+              <a:t>身体保持柔韧则健康，僵硬则衰亡——经常拉伸、瑜伽、太极，保持身体的柔韧性。</a:t>
+            </a:r>
+          </a:p>
+        </p:txBody>
+      </p:sp>
+      <p:sp>
+        <p:nvSpPr>
+          <p:cNvPr id="5" name="Rounded Rectangle 4"/>
+          <p:cNvSpPr/>
+          <p:nvPr/>
+        </p:nvSpPr>
+        <p:spPr>
+          <a:xfrm>
+            <a:off x="457200" y="2606040"/>
+            <a:ext cx="8229600" cy="1143000"/>
+          </a:xfrm>
+          <a:prstGeom prst="roundRect">
+            <a:avLst/>
+          </a:prstGeom>
+          <a:solidFill>
+            <a:srgbClr val="F5F7FA"/>
+          </a:solidFill>
+        </p:spPr>
+        <p:style>
+          <a:lnRef idx="1">
+            <a:schemeClr val="accent1"/>
+          </a:lnRef>
+          <a:fillRef idx="3">
+            <a:schemeClr val="accent1"/>
+          </a:fillRef>
+          <a:effectRef idx="2">
+            <a:schemeClr val="accent1"/>
+          </a:effectRef>
+          <a:fontRef idx="minor">
+            <a:schemeClr val="lt1"/>
+          </a:fontRef>
+        </p:style>
+        <p:txBody>
+          <a:bodyPr rtlCol="0" anchor="ctr" wrap="square"/>
+          <a:lstStyle/>
+          <a:p>
+            <a:pPr algn="ctr">
+              <a:defRPr sz="1700" b="1">
+                <a:solidFill>
+                  <a:srgbClr val="1E3C72"/>
+                </a:solidFill>
+              </a:defRPr>
+            </a:pPr>
+            <a:r>
+              <a:t>💼 商业竞争</a:t>
+            </a:r>
+          </a:p>
+          <a:p>
+            <a:pPr>
+              <a:spcBef>
+                <a:spcPts val="400"/>
+              </a:spcBef>
+              <a:defRPr sz="1500">
+                <a:solidFill>
+                  <a:srgbClr val="333333"/>
+                </a:solidFill>
+              </a:defRPr>
+            </a:pPr>
+            <a:r>
+              <a:t>柔弱胜刚强 → 竞争中不逞强，善用柔韧策略，以退为进，才能在商海中立于不败之地。</a:t>
+            </a:r>
+          </a:p>
+        </p:txBody>
+      </p:sp>
+      <p:sp>
+        <p:nvSpPr>
+          <p:cNvPr id="6" name="Rounded Rectangle 5"/>
+          <p:cNvSpPr/>
+          <p:nvPr/>
+        </p:nvSpPr>
+        <p:spPr>
+          <a:xfrm>
+            <a:off x="457200" y="3840480"/>
+            <a:ext cx="8229600" cy="1143000"/>
+          </a:xfrm>
+          <a:prstGeom prst="roundRect">
+            <a:avLst/>
+          </a:prstGeom>
+          <a:solidFill>
+            <a:srgbClr val="F5F7FA"/>
+          </a:solidFill>
+        </p:spPr>
+        <p:style>
+          <a:lnRef idx="1">
+            <a:schemeClr val="accent1"/>
+          </a:lnRef>
+          <a:fillRef idx="3">
+            <a:schemeClr val="accent1"/>
+          </a:fillRef>
+          <a:effectRef idx="2">
+            <a:schemeClr val="accent1"/>
+          </a:effectRef>
+          <a:fontRef idx="minor">
+            <a:schemeClr val="lt1"/>
+          </a:fontRef>
+        </p:style>
+        <p:txBody>
+          <a:bodyPr rtlCol="0" anchor="ctr" wrap="square"/>
+          <a:lstStyle/>
+          <a:p>
+            <a:pPr algn="ctr">
+              <a:defRPr sz="1700" b="1">
+                <a:solidFill>
+                  <a:srgbClr val="1E3C72"/>
+                </a:solidFill>
+              </a:defRPr>
+            </a:pPr>
+            <a:r>
+              <a:t>🧘 内心修养</a:t>
+            </a:r>
+          </a:p>
+          <a:p>
+            <a:pPr>
+              <a:spcBef>
+                <a:spcPts val="400"/>
+              </a:spcBef>
+              <a:defRPr sz="1500">
+                <a:solidFill>
+                  <a:srgbClr val="333333"/>
+                </a:solidFill>
+              </a:defRPr>
+            </a:pPr>
+            <a:r>
+              <a:t>复归于婴儿 → 减少成人世界的算计与焦虑，保持内心的纯真与好奇，活得更轻松自在。</a:t>
+            </a:r>
+          </a:p>
+        </p:txBody>
+      </p:sp>
+      <p:sp>
+        <p:nvSpPr>
+          <p:cNvPr id="7" name="Rounded Rectangle 6"/>
+          <p:cNvSpPr/>
+          <p:nvPr/>
+        </p:nvSpPr>
+        <p:spPr>
+          <a:xfrm>
+            <a:off x="457200" y="5074920"/>
+            <a:ext cx="8229600" cy="1143000"/>
+          </a:xfrm>
+          <a:prstGeom prst="roundRect">
+            <a:avLst/>
+          </a:prstGeom>
+          <a:solidFill>
+            <a:srgbClr val="F5F7FA"/>
+          </a:solidFill>
+        </p:spPr>
+        <p:style>
+          <a:lnRef idx="1">
+            <a:schemeClr val="accent1"/>
+          </a:lnRef>
+          <a:fillRef idx="3">
+            <a:schemeClr val="accent1"/>
+          </a:fillRef>
+          <a:effectRef idx="2">
+            <a:schemeClr val="accent1"/>
+          </a:effectRef>
+          <a:fontRef idx="minor">
+            <a:schemeClr val="lt1"/>
+          </a:fontRef>
+        </p:style>
+        <p:txBody>
+          <a:bodyPr rtlCol="0" anchor="ctr" wrap="square"/>
+          <a:lstStyle/>
+          <a:p>
+            <a:pPr algn="ctr">
+              <a:defRPr sz="1700" b="1">
+                <a:solidFill>
+                  <a:srgbClr val="1E3C72"/>
+                </a:solidFill>
+              </a:defRPr>
+            </a:pPr>
+            <a:r>
+              <a:t>🤝 人际关系</a:t>
+            </a:r>
+          </a:p>
+          <a:p>
+            <a:pPr>
+              <a:spcBef>
+                <a:spcPts val="400"/>
+              </a:spcBef>
+              <a:defRPr sz="1500">
+                <a:solidFill>
+                  <a:srgbClr val="333333"/>
+                </a:solidFill>
+              </a:defRPr>
+            </a:pPr>
+            <a:r>
+              <a:t>为而不争 → 与人相处多做少说，不争功不抢功，反而更容易获得尊重与信任。</a:t>
+            </a:r>
+          </a:p>
+        </p:txBody>
+      </p:sp>
+      <p:sp>
+        <p:nvSpPr>
+          <p:cNvPr id="8" name="Rounded Rectangle 7"/>
+          <p:cNvSpPr/>
+          <p:nvPr/>
+        </p:nvSpPr>
+        <p:spPr>
+          <a:xfrm>
+            <a:off x="457200" y="6309360"/>
+            <a:ext cx="8229600" cy="1143000"/>
+          </a:xfrm>
+          <a:prstGeom prst="roundRect">
+            <a:avLst/>
+          </a:prstGeom>
+          <a:solidFill>
+            <a:srgbClr val="F5F7FA"/>
+          </a:solidFill>
+        </p:spPr>
+        <p:style>
+          <a:lnRef idx="1">
+            <a:schemeClr val="accent1"/>
+          </a:lnRef>
+          <a:fillRef idx="3">
+            <a:schemeClr val="accent1"/>
+          </a:fillRef>
+          <a:effectRef idx="2">
+            <a:schemeClr val="accent1"/>
+          </a:effectRef>
+          <a:fontRef idx="minor">
+            <a:schemeClr val="lt1"/>
+          </a:fontRef>
+        </p:style>
+        <p:txBody>
+          <a:bodyPr rtlCol="0" anchor="ctr" wrap="square"/>
+          <a:lstStyle/>
+          <a:p>
+            <a:pPr algn="ctr">
+              <a:defRPr sz="1700" b="1">
+                <a:solidFill>
+                  <a:srgbClr val="1E3C72"/>
+                </a:solidFill>
+              </a:defRPr>
+            </a:pPr>
+            <a:r>
+              <a:t>💰 投资理财</a:t>
+            </a:r>
+          </a:p>
+          <a:p>
+            <a:pPr>
+              <a:spcBef>
+                <a:spcPts val="400"/>
+              </a:spcBef>
+              <a:defRPr sz="1500">
+                <a:solidFill>
+                  <a:srgbClr val="333333"/>
+                </a:solidFill>
+              </a:defRPr>
+            </a:pPr>
+            <a:r>
+              <a:t>弱之胜强 → 稳健投资不冒险，不追求高风险高回报，长期坚持反而收获更丰。</a:t>
+            </a:r>
+          </a:p>
+        </p:txBody>
+      </p:sp>
+      <p:sp>
+        <p:nvSpPr>
+          <p:cNvPr id="9" name="TextBox 8"/>
+          <p:cNvSpPr txBox="1"/>
+          <p:nvPr/>
+        </p:nvSpPr>
+        <p:spPr>
+          <a:xfrm>
+            <a:off x="8229600" y="6492240"/>
+            <a:ext cx="731520" cy="274320"/>
+          </a:xfrm>
+          <a:prstGeom prst="rect">
+            <a:avLst/>
+          </a:prstGeom>
+          <a:noFill/>
+        </p:spPr>
+        <p:txBody>
+          <a:bodyPr wrap="none">
+            <a:spAutoFit/>
+          </a:bodyPr>
+          <a:lstStyle/>
+          <a:p>
             <a:pPr algn="r">
-              <a:defRPr sz="1000">
+              <a:defRPr sz="1200">
                 <a:solidFill>
                   <a:srgbClr val="969696"/>
                 </a:solidFill>
               </a:defRPr>
             </a:pPr>
             <a:r>
-              <a:t>12/12</a:t>
+              <a:t>13/14</a:t>
+            </a:r>
+          </a:p>
+        </p:txBody>
+      </p:sp>
+    </p:spTree>
+  </p:cSld>
+  <p:clrMapOvr>
+    <a:masterClrMapping/>
+  </p:clrMapOvr>
+</p:sld>
+</file>
+
+<file path=ppt/slides/slide14.xml><?xml version="1.0" encoding="utf-8"?>
+<p:sld xmlns:a="http://schemas.openxmlformats.org/drawingml/2006/main" xmlns:p="http://schemas.openxmlformats.org/presentationml/2006/main" xmlns:r="http://schemas.openxmlformats.org/officeDocument/2006/relationships">
+  <p:cSld>
+    <p:spTree>
+      <p:nvGrpSpPr>
+        <p:cNvPr id="1" name=""/>
+        <p:cNvGrpSpPr/>
+        <p:nvPr/>
+      </p:nvGrpSpPr>
+      <p:grpSpPr/>
+      <p:sp>
+        <p:nvSpPr>
+          <p:cNvPr id="2" name="Rectangle 1"/>
+          <p:cNvSpPr/>
+          <p:nvPr/>
+        </p:nvSpPr>
+        <p:spPr>
+          <a:xfrm>
+            <a:off x="0" y="0"/>
+            <a:ext cx="9144000" cy="1188720"/>
+          </a:xfrm>
+          <a:prstGeom prst="rect">
+            <a:avLst/>
+          </a:prstGeom>
+          <a:solidFill>
+            <a:srgbClr val="1E3C72"/>
+          </a:solidFill>
+          <a:ln>
+            <a:noFill/>
+          </a:ln>
+        </p:spPr>
+        <p:style>
+          <a:lnRef idx="1">
+            <a:schemeClr val="accent1"/>
+          </a:lnRef>
+          <a:fillRef idx="3">
+            <a:schemeClr val="accent1"/>
+          </a:fillRef>
+          <a:effectRef idx="2">
+            <a:schemeClr val="accent1"/>
+          </a:effectRef>
+          <a:fontRef idx="minor">
+            <a:schemeClr val="lt1"/>
+          </a:fontRef>
+        </p:style>
+        <p:txBody>
+          <a:bodyPr rtlCol="0" anchor="ctr"/>
+          <a:lstStyle/>
+          <a:p>
+            <a:pPr algn="ctr"/>
+          </a:p>
+        </p:txBody>
+      </p:sp>
+      <p:sp>
+        <p:nvSpPr>
+          <p:cNvPr id="3" name="TextBox 2"/>
+          <p:cNvSpPr txBox="1"/>
+          <p:nvPr/>
+        </p:nvSpPr>
+        <p:spPr>
+          <a:xfrm>
+            <a:off x="548640" y="274320"/>
+            <a:ext cx="8229600" cy="731520"/>
+          </a:xfrm>
+          <a:prstGeom prst="rect">
+            <a:avLst/>
+          </a:prstGeom>
+          <a:noFill/>
+        </p:spPr>
+        <p:txBody>
+          <a:bodyPr wrap="none">
+            <a:spAutoFit/>
+          </a:bodyPr>
+          <a:lstStyle/>
+          <a:p>
+            <a:pPr>
+              <a:defRPr sz="3000" b="1">
+                <a:solidFill>
+                  <a:srgbClr val="FFFFFF"/>
+                </a:solidFill>
+              </a:defRPr>
+            </a:pPr>
+            <a:r>
+              <a:t>第24课 · 结语</a:t>
+            </a:r>
+          </a:p>
+        </p:txBody>
+      </p:sp>
+      <p:sp>
+        <p:nvSpPr>
+          <p:cNvPr id="4" name="Rounded Rectangle 3"/>
+          <p:cNvSpPr/>
+          <p:nvPr/>
+        </p:nvSpPr>
+        <p:spPr>
+          <a:xfrm>
+            <a:off x="914400" y="1828800"/>
+            <a:ext cx="7315200" cy="1828800"/>
+          </a:xfrm>
+          <a:prstGeom prst="roundRect">
+            <a:avLst/>
+          </a:prstGeom>
+          <a:solidFill>
+            <a:srgbClr val="14233C"/>
+          </a:solidFill>
+        </p:spPr>
+        <p:style>
+          <a:lnRef idx="1">
+            <a:schemeClr val="accent1"/>
+          </a:lnRef>
+          <a:fillRef idx="3">
+            <a:schemeClr val="accent1"/>
+          </a:fillRef>
+          <a:effectRef idx="2">
+            <a:schemeClr val="accent1"/>
+          </a:effectRef>
+          <a:fontRef idx="minor">
+            <a:schemeClr val="lt1"/>
+          </a:fontRef>
+        </p:style>
+        <p:txBody>
+          <a:bodyPr rtlCol="0" anchor="ctr" wrap="square"/>
+          <a:lstStyle/>
+          <a:p>
+            <a:pPr algn="ctr">
+              <a:defRPr sz="3600" b="1">
+                <a:solidFill>
+                  <a:srgbClr val="FFFFFF"/>
+                </a:solidFill>
+              </a:defRPr>
+            </a:pPr>
+            <a:r>
+              <a:t>柔弱胜刚强</a:t>
+            </a:r>
+          </a:p>
+          <a:p>
+            <a:pPr algn="ctr">
+              <a:spcBef>
+                <a:spcPts val="1000"/>
+              </a:spcBef>
+              <a:defRPr sz="1800" i="1">
+                <a:solidFill>
+                  <a:srgbClr val="4682B4"/>
+                </a:solidFill>
+              </a:defRPr>
+            </a:pPr>
+            <a:r>
+              <a:t>天下莫柔弱于水，而攻坚强者莫之能胜</a:t>
+            </a:r>
+          </a:p>
+          <a:p>
+            <a:pPr algn="ctr">
+              <a:defRPr sz="1600">
+                <a:solidFill>
+                  <a:srgbClr val="B4B4B4"/>
+                </a:solidFill>
+              </a:defRPr>
+            </a:pPr>
+            <a:r>
+              <a:t>为而不争，天之道也</a:t>
+            </a:r>
+          </a:p>
+        </p:txBody>
+      </p:sp>
+      <p:sp>
+        <p:nvSpPr>
+          <p:cNvPr id="5" name="TextBox 4"/>
+          <p:cNvSpPr txBox="1"/>
+          <p:nvPr/>
+        </p:nvSpPr>
+        <p:spPr>
+          <a:xfrm>
+            <a:off x="914400" y="4114800"/>
+            <a:ext cx="7315200" cy="1828800"/>
+          </a:xfrm>
+          <a:prstGeom prst="rect">
+            <a:avLst/>
+          </a:prstGeom>
+          <a:noFill/>
+        </p:spPr>
+        <p:txBody>
+          <a:bodyPr wrap="square">
+            <a:spAutoFit/>
+          </a:bodyPr>
+          <a:lstStyle/>
+          <a:p>
+            <a:pPr algn="ctr">
+              <a:defRPr sz="1600">
+                <a:solidFill>
+                  <a:srgbClr val="333333"/>
+                </a:solidFill>
+              </a:defRPr>
+            </a:pPr>
+            <a:r>
+              <a:t>道家智慧：至柔驰骋至坚，无有入无间。柔弱不是软弱，而是最具生命力的力量。</a:t>
+            </a:r>
+          </a:p>
+          <a:p>
+            <a:pPr algn="ctr">
+              <a:spcBef>
+                <a:spcPts val="800"/>
+              </a:spcBef>
+              <a:defRPr sz="1500">
+                <a:solidFill>
+                  <a:srgbClr val="4682B4"/>
+                </a:solidFill>
+              </a:defRPr>
+            </a:pPr>
+            <a:r>
+              <a:t>知雄守雌，复归于朴——这是老子留给我们的处世良方。</a:t>
+            </a:r>
+          </a:p>
+        </p:txBody>
+      </p:sp>
+      <p:sp>
+        <p:nvSpPr>
+          <p:cNvPr id="6" name="TextBox 5"/>
+          <p:cNvSpPr txBox="1"/>
+          <p:nvPr/>
+        </p:nvSpPr>
+        <p:spPr>
+          <a:xfrm>
+            <a:off x="8229600" y="6492240"/>
+            <a:ext cx="731520" cy="274320"/>
+          </a:xfrm>
+          <a:prstGeom prst="rect">
+            <a:avLst/>
+          </a:prstGeom>
+          <a:noFill/>
+        </p:spPr>
+        <p:txBody>
+          <a:bodyPr wrap="none">
+            <a:spAutoFit/>
+          </a:bodyPr>
+          <a:lstStyle/>
+          <a:p>
+            <a:pPr algn="r">
+              <a:defRPr sz="1200">
+                <a:solidFill>
+                  <a:srgbClr val="969696"/>
+                </a:solidFill>
+              </a:defRPr>
+            </a:pPr>
+            <a:r>
+              <a:t>14/14</a:t>
             </a:r>
           </a:p>
         </p:txBody>
@@ -4376,13 +5238,13 @@
         <p:spPr>
           <a:xfrm>
             <a:off x="0" y="0"/>
-            <a:ext cx="9144000" cy="1005840"/>
+            <a:ext cx="9144000" cy="1188720"/>
           </a:xfrm>
           <a:prstGeom prst="rect">
             <a:avLst/>
           </a:prstGeom>
           <a:solidFill>
-            <a:srgbClr val="00529B"/>
+            <a:srgbClr val="1E3C72"/>
           </a:solidFill>
           <a:ln>
             <a:noFill/>
@@ -4418,8 +5280,8 @@
         </p:nvSpPr>
         <p:spPr>
           <a:xfrm>
-            <a:off x="457200" y="228600"/>
-            <a:ext cx="8229600" cy="640080"/>
+            <a:off x="548640" y="274320"/>
+            <a:ext cx="8229600" cy="731520"/>
           </a:xfrm>
           <a:prstGeom prst="rect">
             <a:avLst/>
@@ -4433,14 +5295,14 @@
           <a:lstStyle/>
           <a:p>
             <a:pPr>
-              <a:defRPr sz="2800" b="1">
+              <a:defRPr sz="3000" b="1">
                 <a:solidFill>
                   <a:srgbClr val="FFFFFF"/>
                 </a:solidFill>
               </a:defRPr>
             </a:pPr>
             <a:r>
-              <a:t>第七十三章 · 勇于敢</a:t>
+              <a:t>今日课程</a:t>
             </a:r>
           </a:p>
         </p:txBody>
@@ -4453,14 +5315,14 @@
         </p:nvSpPr>
         <p:spPr>
           <a:xfrm>
-            <a:off x="457200" y="1280160"/>
-            <a:ext cx="8229600" cy="3840480"/>
+            <a:off x="457200" y="1371600"/>
+            <a:ext cx="8229600" cy="1371600"/>
           </a:xfrm>
           <a:prstGeom prst="roundRect">
             <a:avLst/>
           </a:prstGeom>
           <a:solidFill>
-            <a:srgbClr val="F2F6FA"/>
+            <a:srgbClr val="F5F7FA"/>
           </a:solidFill>
         </p:spPr>
         <p:style>
@@ -4482,198 +5344,171 @@
           <a:lstStyle/>
           <a:p>
             <a:pPr algn="ctr">
+              <a:defRPr sz="2000" b="1">
+                <a:solidFill>
+                  <a:srgbClr val="1E3C72"/>
+                </a:solidFill>
+              </a:defRPr>
+            </a:pPr>
+            <a:r>
+              <a:t>📖 第七十六章：出生入死</a:t>
+            </a:r>
+          </a:p>
+          <a:p>
+            <a:pPr>
+              <a:spcBef>
+                <a:spcPts val="500"/>
+              </a:spcBef>
               <a:defRPr sz="1600">
                 <a:solidFill>
-                  <a:srgbClr val="00529B"/>
-                </a:solidFill>
-                <a:latin typeface="SimSun"/>
-              </a:defRPr>
-            </a:pPr>
-            <a:r>
-              <a:t>勇于敢则杀，</a:t>
-            </a:r>
-          </a:p>
-          <a:p>
-            <a:pPr>
+                  <a:srgbClr val="333333"/>
+                </a:solidFill>
+              </a:defRPr>
+            </a:pPr>
+            <a:r>
+              <a:t>民之生也柔弱，死也坚强。万物草木之生也柔脆，死也枯槁。故坚强者死之徒，柔弱者生之徒。</a:t>
+            </a:r>
+          </a:p>
+        </p:txBody>
+      </p:sp>
+      <p:sp>
+        <p:nvSpPr>
+          <p:cNvPr id="5" name="Rounded Rectangle 4"/>
+          <p:cNvSpPr/>
+          <p:nvPr/>
+        </p:nvSpPr>
+        <p:spPr>
+          <a:xfrm>
+            <a:off x="457200" y="2880360"/>
+            <a:ext cx="8229600" cy="1371600"/>
+          </a:xfrm>
+          <a:prstGeom prst="roundRect">
+            <a:avLst/>
+          </a:prstGeom>
+          <a:solidFill>
+            <a:srgbClr val="F5F7FA"/>
+          </a:solidFill>
+        </p:spPr>
+        <p:style>
+          <a:lnRef idx="1">
+            <a:schemeClr val="accent1"/>
+          </a:lnRef>
+          <a:fillRef idx="3">
+            <a:schemeClr val="accent1"/>
+          </a:fillRef>
+          <a:effectRef idx="2">
+            <a:schemeClr val="accent1"/>
+          </a:effectRef>
+          <a:fontRef idx="minor">
+            <a:schemeClr val="lt1"/>
+          </a:fontRef>
+        </p:style>
+        <p:txBody>
+          <a:bodyPr rtlCol="0" anchor="ctr" wrap="square"/>
+          <a:lstStyle/>
+          <a:p>
+            <a:pPr algn="ctr">
+              <a:defRPr sz="2000" b="1">
+                <a:solidFill>
+                  <a:srgbClr val="1E3C72"/>
+                </a:solidFill>
+              </a:defRPr>
+            </a:pPr>
+            <a:r>
+              <a:t>📖 第七十七章：柔弱处上</a:t>
+            </a:r>
+          </a:p>
+          <a:p>
+            <a:pPr>
+              <a:spcBef>
+                <a:spcPts val="500"/>
+              </a:spcBef>
               <a:defRPr sz="1600">
                 <a:solidFill>
-                  <a:srgbClr val="00529B"/>
-                </a:solidFill>
-                <a:latin typeface="SimSun"/>
-              </a:defRPr>
-            </a:pPr>
-            <a:r>
-              <a:t>勇于不敢则活。</a:t>
-            </a:r>
-          </a:p>
-          <a:p>
-            <a:pPr>
+                  <a:srgbClr val="333333"/>
+                </a:solidFill>
+              </a:defRPr>
+            </a:pPr>
+            <a:r>
+              <a:t>天下之至柔，驰骋天下之至坚。无有入无间。柔弱胜刚强。</a:t>
+            </a:r>
+          </a:p>
+        </p:txBody>
+      </p:sp>
+      <p:sp>
+        <p:nvSpPr>
+          <p:cNvPr id="6" name="Rounded Rectangle 5"/>
+          <p:cNvSpPr/>
+          <p:nvPr/>
+        </p:nvSpPr>
+        <p:spPr>
+          <a:xfrm>
+            <a:off x="457200" y="4389120"/>
+            <a:ext cx="8229600" cy="1371600"/>
+          </a:xfrm>
+          <a:prstGeom prst="roundRect">
+            <a:avLst/>
+          </a:prstGeom>
+          <a:solidFill>
+            <a:srgbClr val="F5F7FA"/>
+          </a:solidFill>
+        </p:spPr>
+        <p:style>
+          <a:lnRef idx="1">
+            <a:schemeClr val="accent1"/>
+          </a:lnRef>
+          <a:fillRef idx="3">
+            <a:schemeClr val="accent1"/>
+          </a:fillRef>
+          <a:effectRef idx="2">
+            <a:schemeClr val="accent1"/>
+          </a:effectRef>
+          <a:fontRef idx="minor">
+            <a:schemeClr val="lt1"/>
+          </a:fontRef>
+        </p:style>
+        <p:txBody>
+          <a:bodyPr rtlCol="0" anchor="ctr" wrap="square"/>
+          <a:lstStyle/>
+          <a:p>
+            <a:pPr algn="ctr">
+              <a:defRPr sz="2000" b="1">
+                <a:solidFill>
+                  <a:srgbClr val="1E3C72"/>
+                </a:solidFill>
+              </a:defRPr>
+            </a:pPr>
+            <a:r>
+              <a:t>📖 第七十八章：为而不争</a:t>
+            </a:r>
+          </a:p>
+          <a:p>
+            <a:pPr>
+              <a:spcBef>
+                <a:spcPts val="500"/>
+              </a:spcBef>
               <a:defRPr sz="1600">
                 <a:solidFill>
-                  <a:srgbClr val="00529B"/>
-                </a:solidFill>
-                <a:latin typeface="SimSun"/>
-              </a:defRPr>
-            </a:pPr>
-          </a:p>
-          <a:p>
-            <a:pPr>
-              <a:defRPr sz="1600">
-                <a:solidFill>
-                  <a:srgbClr val="00529B"/>
-                </a:solidFill>
-                <a:latin typeface="SimSun"/>
-              </a:defRPr>
-            </a:pPr>
-            <a:r>
-              <a:t>此两者，或利或害。</a:t>
-            </a:r>
-          </a:p>
-          <a:p>
-            <a:pPr>
-              <a:defRPr sz="1600">
-                <a:solidFill>
-                  <a:srgbClr val="00529B"/>
-                </a:solidFill>
-                <a:latin typeface="SimSun"/>
-              </a:defRPr>
-            </a:pPr>
-            <a:r>
-              <a:t>天之所恶，孰知其故？</a:t>
-            </a:r>
-          </a:p>
-          <a:p>
-            <a:pPr>
-              <a:defRPr sz="1600">
-                <a:solidFill>
-                  <a:srgbClr val="00529B"/>
-                </a:solidFill>
-                <a:latin typeface="SimSun"/>
-              </a:defRPr>
-            </a:pPr>
-            <a:r>
-              <a:t>是以圣人犹难之。</a:t>
-            </a:r>
-          </a:p>
-          <a:p>
-            <a:pPr>
-              <a:defRPr sz="1600">
-                <a:solidFill>
-                  <a:srgbClr val="00529B"/>
-                </a:solidFill>
-                <a:latin typeface="SimSun"/>
-              </a:defRPr>
-            </a:pPr>
-          </a:p>
-          <a:p>
-            <a:pPr>
-              <a:defRPr sz="1600">
-                <a:solidFill>
-                  <a:srgbClr val="00529B"/>
-                </a:solidFill>
-                <a:latin typeface="SimSun"/>
-              </a:defRPr>
-            </a:pPr>
-            <a:r>
-              <a:t>天之道，不争而善胜，</a:t>
-            </a:r>
-          </a:p>
-          <a:p>
-            <a:pPr>
-              <a:defRPr sz="1600">
-                <a:solidFill>
-                  <a:srgbClr val="00529B"/>
-                </a:solidFill>
-                <a:latin typeface="SimSun"/>
-              </a:defRPr>
-            </a:pPr>
-            <a:r>
-              <a:t>不言而善应，</a:t>
-            </a:r>
-          </a:p>
-          <a:p>
-            <a:pPr>
-              <a:defRPr sz="1600">
-                <a:solidFill>
-                  <a:srgbClr val="00529B"/>
-                </a:solidFill>
-                <a:latin typeface="SimSun"/>
-              </a:defRPr>
-            </a:pPr>
-            <a:r>
-              <a:t>繟然而善谋。</a:t>
-            </a:r>
-          </a:p>
-          <a:p>
-            <a:pPr>
-              <a:defRPr sz="1600">
-                <a:solidFill>
-                  <a:srgbClr val="00529B"/>
-                </a:solidFill>
-                <a:latin typeface="SimSun"/>
-              </a:defRPr>
-            </a:pPr>
-          </a:p>
-          <a:p>
-            <a:pPr>
-              <a:defRPr sz="1600">
-                <a:solidFill>
-                  <a:srgbClr val="00529B"/>
-                </a:solidFill>
-                <a:latin typeface="SimSun"/>
-              </a:defRPr>
-            </a:pPr>
-            <a:r>
-              <a:t>天网恢恢，疏而不失。</a:t>
-            </a:r>
-          </a:p>
-        </p:txBody>
-      </p:sp>
-      <p:sp>
-        <p:nvSpPr>
-          <p:cNvPr id="5" name="TextBox 4"/>
+                  <a:srgbClr val="333333"/>
+                </a:solidFill>
+              </a:defRPr>
+            </a:pPr>
+            <a:r>
+              <a:t>天下莫柔弱于水，而攻坚强者莫之能胜。以柔克刚，知其雄，守其雌。</a:t>
+            </a:r>
+          </a:p>
+        </p:txBody>
+      </p:sp>
+      <p:sp>
+        <p:nvSpPr>
+          <p:cNvPr id="7" name="TextBox 6"/>
           <p:cNvSpPr txBox="1"/>
           <p:nvPr/>
         </p:nvSpPr>
         <p:spPr>
           <a:xfrm>
-            <a:off x="457200" y="5212080"/>
-            <a:ext cx="8229600" cy="1371600"/>
-          </a:xfrm>
-          <a:prstGeom prst="rect">
-            <a:avLst/>
-          </a:prstGeom>
-          <a:noFill/>
-        </p:spPr>
-        <p:txBody>
-          <a:bodyPr wrap="square">
-            <a:spAutoFit/>
-          </a:bodyPr>
-          <a:lstStyle/>
-          <a:p>
-            <a:pPr>
-              <a:defRPr sz="1200">
-                <a:solidFill>
-                  <a:srgbClr val="333333"/>
-                </a:solidFill>
-              </a:defRPr>
-            </a:pPr>
-            <a:r>
-              <a:t>【白话解读】勇于敢作敢为就会招致杀身之祸，勇于不敢作为就能保全性命。这两种行为，一个有利一个有害。上天所厌恶的，谁能知道是什么缘故？圣人也难以解释。天道不争斗而善于获胜，不言语而善于回应，从容自然却善于谋划。天道就像一张巨大的网，虽然稀疏却不会漏失任何事物。</a:t>
-            </a:r>
-          </a:p>
-        </p:txBody>
-      </p:sp>
-      <p:sp>
-        <p:nvSpPr>
-          <p:cNvPr id="6" name="TextBox 5"/>
-          <p:cNvSpPr txBox="1"/>
-          <p:nvPr/>
-        </p:nvSpPr>
-        <p:spPr>
-          <a:xfrm>
-            <a:off x="8503920" y="6492240"/>
-            <a:ext cx="457200" cy="274320"/>
+            <a:off x="8229600" y="6492240"/>
+            <a:ext cx="731520" cy="274320"/>
           </a:xfrm>
           <a:prstGeom prst="rect">
             <a:avLst/>
@@ -4687,14 +5522,14 @@
           <a:lstStyle/>
           <a:p>
             <a:pPr algn="r">
-              <a:defRPr sz="1000">
+              <a:defRPr sz="1200">
                 <a:solidFill>
                   <a:srgbClr val="969696"/>
                 </a:solidFill>
               </a:defRPr>
             </a:pPr>
             <a:r>
-              <a:t>2/12</a:t>
+              <a:t>2/14</a:t>
             </a:r>
           </a:p>
         </p:txBody>
@@ -4726,13 +5561,13 @@
         <p:spPr>
           <a:xfrm>
             <a:off x="0" y="0"/>
-            <a:ext cx="9144000" cy="1005840"/>
+            <a:ext cx="9144000" cy="1188720"/>
           </a:xfrm>
           <a:prstGeom prst="rect">
             <a:avLst/>
           </a:prstGeom>
           <a:solidFill>
-            <a:srgbClr val="00529B"/>
+            <a:srgbClr val="1E3C72"/>
           </a:solidFill>
           <a:ln>
             <a:noFill/>
@@ -4768,8 +5603,8 @@
         </p:nvSpPr>
         <p:spPr>
           <a:xfrm>
-            <a:off x="457200" y="228600"/>
-            <a:ext cx="8229600" cy="640080"/>
+            <a:off x="548640" y="274320"/>
+            <a:ext cx="8229600" cy="731520"/>
           </a:xfrm>
           <a:prstGeom prst="rect">
             <a:avLst/>
@@ -4783,14 +5618,14 @@
           <a:lstStyle/>
           <a:p>
             <a:pPr>
-              <a:defRPr sz="2800" b="1">
+              <a:defRPr sz="3000" b="1">
                 <a:solidFill>
                   <a:srgbClr val="FFFFFF"/>
                 </a:solidFill>
               </a:defRPr>
             </a:pPr>
             <a:r>
-              <a:t>第七十三章 · 核心思想</a:t>
+              <a:t>第七十六章 · 出生入死</a:t>
             </a:r>
           </a:p>
         </p:txBody>
@@ -4803,15 +5638,20 @@
         </p:nvSpPr>
         <p:spPr>
           <a:xfrm>
-            <a:off x="457200" y="1188720"/>
-            <a:ext cx="8229600" cy="1097280"/>
+            <a:off x="457200" y="1371600"/>
+            <a:ext cx="8229600" cy="3474720"/>
           </a:xfrm>
           <a:prstGeom prst="roundRect">
             <a:avLst/>
           </a:prstGeom>
           <a:solidFill>
-            <a:srgbClr val="007AC2"/>
+            <a:srgbClr val="14233C"/>
           </a:solidFill>
+          <a:ln>
+            <a:solidFill>
+              <a:srgbClr val="1E3C72"/>
+            </a:solidFill>
+          </a:ln>
         </p:spPr>
         <p:style>
           <a:lnRef idx="1">
@@ -4832,26 +5672,134 @@
           <a:lstStyle/>
           <a:p>
             <a:pPr algn="ctr">
-              <a:defRPr sz="1800" b="1">
+              <a:defRPr sz="1600" b="1">
+                <a:solidFill>
+                  <a:srgbClr val="4682B4"/>
+                </a:solidFill>
+              </a:defRPr>
+            </a:pPr>
+            <a:r>
+              <a:t>【原文】</a:t>
+            </a:r>
+          </a:p>
+          <a:p>
+            <a:pPr>
+              <a:spcBef>
+                <a:spcPts val="300"/>
+              </a:spcBef>
+              <a:defRPr sz="2200">
                 <a:solidFill>
                   <a:srgbClr val="FFFFFF"/>
                 </a:solidFill>
               </a:defRPr>
             </a:pPr>
             <a:r>
-              <a:t>🌟 核心观点</a:t>
-            </a:r>
-          </a:p>
-          <a:p>
-            <a:pPr>
-              <a:defRPr sz="1400">
-                <a:solidFill>
-                  <a:srgbClr val="E6E6E6"/>
-                </a:solidFill>
-              </a:defRPr>
-            </a:pPr>
-            <a:r>
-              <a:t>勇于敢则杀，勇于不敢则活——真正的勇气不是逞强好胜，而是知道何时该退让。天网恢恢，疏而不失，善恶终有报。</a:t>
+              <a:t>人之生也柔弱，其死也坚强。</a:t>
+            </a:r>
+          </a:p>
+          <a:p>
+            <a:pPr>
+              <a:spcBef>
+                <a:spcPts val="300"/>
+              </a:spcBef>
+              <a:defRPr sz="2200">
+                <a:solidFill>
+                  <a:srgbClr val="FFFFFF"/>
+                </a:solidFill>
+              </a:defRPr>
+            </a:pPr>
+            <a:r>
+              <a:t>万物草木之生也柔脆，其死也枯槁。</a:t>
+            </a:r>
+          </a:p>
+          <a:p>
+            <a:pPr>
+              <a:spcBef>
+                <a:spcPts val="300"/>
+              </a:spcBef>
+              <a:defRPr sz="2200">
+                <a:solidFill>
+                  <a:srgbClr val="FFFFFF"/>
+                </a:solidFill>
+              </a:defRPr>
+            </a:pPr>
+            <a:r>
+              <a:t>　</a:t>
+            </a:r>
+          </a:p>
+          <a:p>
+            <a:pPr>
+              <a:spcBef>
+                <a:spcPts val="300"/>
+              </a:spcBef>
+              <a:defRPr sz="2200">
+                <a:solidFill>
+                  <a:srgbClr val="FFFFFF"/>
+                </a:solidFill>
+              </a:defRPr>
+            </a:pPr>
+            <a:r>
+              <a:t>故坚强者死之徒，柔弱者生之徒。</a:t>
+            </a:r>
+          </a:p>
+          <a:p>
+            <a:pPr>
+              <a:spcBef>
+                <a:spcPts val="300"/>
+              </a:spcBef>
+              <a:defRPr sz="2200">
+                <a:solidFill>
+                  <a:srgbClr val="FFFFFF"/>
+                </a:solidFill>
+              </a:defRPr>
+            </a:pPr>
+            <a:r>
+              <a:t>　</a:t>
+            </a:r>
+          </a:p>
+          <a:p>
+            <a:pPr>
+              <a:spcBef>
+                <a:spcPts val="300"/>
+              </a:spcBef>
+              <a:defRPr sz="2200">
+                <a:solidFill>
+                  <a:srgbClr val="FFFFFF"/>
+                </a:solidFill>
+              </a:defRPr>
+            </a:pPr>
+            <a:r>
+              <a:t>兵强则不胜，木强则兵。</a:t>
+            </a:r>
+          </a:p>
+          <a:p>
+            <a:pPr>
+              <a:spcBef>
+                <a:spcPts val="300"/>
+              </a:spcBef>
+              <a:defRPr sz="2200">
+                <a:solidFill>
+                  <a:srgbClr val="FFFFFF"/>
+                </a:solidFill>
+              </a:defRPr>
+            </a:pPr>
+            <a:r>
+              <a:t>　</a:t>
+            </a:r>
+          </a:p>
+          <a:p>
+            <a:pPr>
+              <a:spcBef>
+                <a:spcPts val="300"/>
+              </a:spcBef>
+              <a:defRPr sz="2200">
+                <a:solidFill>
+                  <a:srgbClr val="FFFFFF"/>
+                </a:solidFill>
+              </a:defRPr>
+            </a:pPr>
+            <a:r>
+              <a:t>强大处下，柔弱处上。</a:t>
             </a:r>
           </a:p>
         </p:txBody>
@@ -4864,15 +5812,20 @@
         </p:nvSpPr>
         <p:spPr>
           <a:xfrm>
-            <a:off x="457200" y="2377440"/>
-            <a:ext cx="8229600" cy="914400"/>
+            <a:off x="457200" y="4937760"/>
+            <a:ext cx="8229600" cy="1463040"/>
           </a:xfrm>
           <a:prstGeom prst="roundRect">
             <a:avLst/>
           </a:prstGeom>
           <a:solidFill>
-            <a:srgbClr val="F2F6FA"/>
+            <a:srgbClr val="F5F7FA"/>
           </a:solidFill>
+          <a:ln>
+            <a:solidFill>
+              <a:srgbClr val="4682B4"/>
+            </a:solidFill>
+          </a:ln>
         </p:spPr>
         <p:style>
           <a:lnRef idx="1">
@@ -4893,223 +5846,43 @@
           <a:lstStyle/>
           <a:p>
             <a:pPr algn="ctr">
-              <a:defRPr sz="1400" b="1">
-                <a:solidFill>
-                  <a:srgbClr val="00529B"/>
-                </a:solidFill>
-              </a:defRPr>
-            </a:pPr>
-            <a:r>
-              <a:t>1. 勇于敢则杀</a:t>
-            </a:r>
-          </a:p>
-          <a:p>
-            <a:pPr>
-              <a:defRPr sz="1200">
+              <a:defRPr sz="1500" b="1">
+                <a:solidFill>
+                  <a:srgbClr val="1E3C72"/>
+                </a:solidFill>
+              </a:defRPr>
+            </a:pPr>
+            <a:r>
+              <a:t>【白话解读】</a:t>
+            </a:r>
+          </a:p>
+          <a:p>
+            <a:pPr>
+              <a:spcBef>
+                <a:spcPts val="500"/>
+              </a:spcBef>
+              <a:defRPr sz="1800">
                 <a:solidFill>
                   <a:srgbClr val="333333"/>
                 </a:solidFill>
               </a:defRPr>
             </a:pPr>
             <a:r>
-              <a:t>敢于冒险、逞强好胜的人，往往招致灾祸——匹夫之勇不可取。</a:t>
-            </a:r>
-          </a:p>
-        </p:txBody>
-      </p:sp>
-      <p:sp>
-        <p:nvSpPr>
-          <p:cNvPr id="6" name="Rounded Rectangle 5"/>
-          <p:cNvSpPr/>
-          <p:nvPr/>
-        </p:nvSpPr>
-        <p:spPr>
-          <a:xfrm>
-            <a:off x="457200" y="3383280"/>
-            <a:ext cx="8229600" cy="914400"/>
-          </a:xfrm>
-          <a:prstGeom prst="roundRect">
-            <a:avLst/>
-          </a:prstGeom>
-          <a:solidFill>
-            <a:srgbClr val="F2F6FA"/>
-          </a:solidFill>
-        </p:spPr>
-        <p:style>
-          <a:lnRef idx="1">
-            <a:schemeClr val="accent1"/>
-          </a:lnRef>
-          <a:fillRef idx="3">
-            <a:schemeClr val="accent1"/>
-          </a:fillRef>
-          <a:effectRef idx="2">
-            <a:schemeClr val="accent1"/>
-          </a:effectRef>
-          <a:fontRef idx="minor">
-            <a:schemeClr val="lt1"/>
-          </a:fontRef>
-        </p:style>
-        <p:txBody>
-          <a:bodyPr rtlCol="0" anchor="ctr" wrap="square"/>
-          <a:lstStyle/>
-          <a:p>
-            <a:pPr algn="ctr">
-              <a:defRPr sz="1400" b="1">
-                <a:solidFill>
-                  <a:srgbClr val="00529B"/>
-                </a:solidFill>
-              </a:defRPr>
-            </a:pPr>
-            <a:r>
-              <a:t>2. 勇于不敢则活</a:t>
-            </a:r>
-          </a:p>
-          <a:p>
-            <a:pPr>
-              <a:defRPr sz="1200">
-                <a:solidFill>
-                  <a:srgbClr val="333333"/>
-                </a:solidFill>
-              </a:defRPr>
-            </a:pPr>
-            <a:r>
-              <a:t>懂得退让、不轻举妄动的人，才能保全自己——柔弱胜刚强。</a:t>
-            </a:r>
-          </a:p>
-        </p:txBody>
-      </p:sp>
-      <p:sp>
-        <p:nvSpPr>
-          <p:cNvPr id="7" name="Rounded Rectangle 6"/>
-          <p:cNvSpPr/>
-          <p:nvPr/>
-        </p:nvSpPr>
-        <p:spPr>
-          <a:xfrm>
-            <a:off x="457200" y="4389120"/>
-            <a:ext cx="8229600" cy="914400"/>
-          </a:xfrm>
-          <a:prstGeom prst="roundRect">
-            <a:avLst/>
-          </a:prstGeom>
-          <a:solidFill>
-            <a:srgbClr val="F2F6FA"/>
-          </a:solidFill>
-        </p:spPr>
-        <p:style>
-          <a:lnRef idx="1">
-            <a:schemeClr val="accent1"/>
-          </a:lnRef>
-          <a:fillRef idx="3">
-            <a:schemeClr val="accent1"/>
-          </a:fillRef>
-          <a:effectRef idx="2">
-            <a:schemeClr val="accent1"/>
-          </a:effectRef>
-          <a:fontRef idx="minor">
-            <a:schemeClr val="lt1"/>
-          </a:fontRef>
-        </p:style>
-        <p:txBody>
-          <a:bodyPr rtlCol="0" anchor="ctr" wrap="square"/>
-          <a:lstStyle/>
-          <a:p>
-            <a:pPr algn="ctr">
-              <a:defRPr sz="1400" b="1">
-                <a:solidFill>
-                  <a:srgbClr val="00529B"/>
-                </a:solidFill>
-              </a:defRPr>
-            </a:pPr>
-            <a:r>
-              <a:t>3. 天之道</a:t>
-            </a:r>
-          </a:p>
-          <a:p>
-            <a:pPr>
-              <a:defRPr sz="1200">
-                <a:solidFill>
-                  <a:srgbClr val="333333"/>
-                </a:solidFill>
-              </a:defRPr>
-            </a:pPr>
-            <a:r>
-              <a:t>天道不争而善胜，不言而善应——真正的强者是那些看似柔弱的人。</a:t>
-            </a:r>
-          </a:p>
-        </p:txBody>
-      </p:sp>
-      <p:sp>
-        <p:nvSpPr>
-          <p:cNvPr id="8" name="Rounded Rectangle 7"/>
-          <p:cNvSpPr/>
-          <p:nvPr/>
-        </p:nvSpPr>
-        <p:spPr>
-          <a:xfrm>
-            <a:off x="457200" y="5394960"/>
-            <a:ext cx="8229600" cy="914400"/>
-          </a:xfrm>
-          <a:prstGeom prst="roundRect">
-            <a:avLst/>
-          </a:prstGeom>
-          <a:solidFill>
-            <a:srgbClr val="F2F6FA"/>
-          </a:solidFill>
-        </p:spPr>
-        <p:style>
-          <a:lnRef idx="1">
-            <a:schemeClr val="accent1"/>
-          </a:lnRef>
-          <a:fillRef idx="3">
-            <a:schemeClr val="accent1"/>
-          </a:fillRef>
-          <a:effectRef idx="2">
-            <a:schemeClr val="accent1"/>
-          </a:effectRef>
-          <a:fontRef idx="minor">
-            <a:schemeClr val="lt1"/>
-          </a:fontRef>
-        </p:style>
-        <p:txBody>
-          <a:bodyPr rtlCol="0" anchor="ctr" wrap="square"/>
-          <a:lstStyle/>
-          <a:p>
-            <a:pPr algn="ctr">
-              <a:defRPr sz="1400" b="1">
-                <a:solidFill>
-                  <a:srgbClr val="00529B"/>
-                </a:solidFill>
-              </a:defRPr>
-            </a:pPr>
-            <a:r>
-              <a:t>4. 天网恢恢</a:t>
-            </a:r>
-          </a:p>
-          <a:p>
-            <a:pPr>
-              <a:defRPr sz="1200">
-                <a:solidFill>
-                  <a:srgbClr val="333333"/>
-                </a:solidFill>
-              </a:defRPr>
-            </a:pPr>
-            <a:r>
-              <a:t>天道如网，虽然稀疏却不会漏失——因果报应，真实不虚。</a:t>
-            </a:r>
-          </a:p>
-        </p:txBody>
-      </p:sp>
-      <p:sp>
-        <p:nvSpPr>
-          <p:cNvPr id="9" name="TextBox 8"/>
+              <a:t>人活着时身体柔软，死了则变得僵硬。万物草木活着时枝条柔脆，死了则干枯。所以坚强的东西属于死亡一类，柔弱的东西属于生存一类。军队过于强大反而不能取胜，树木过于强硬则会被砍伐。强大的处于下位，柔弱的反而在上。</a:t>
+            </a:r>
+          </a:p>
+        </p:txBody>
+      </p:sp>
+      <p:sp>
+        <p:nvSpPr>
+          <p:cNvPr id="6" name="TextBox 5"/>
           <p:cNvSpPr txBox="1"/>
           <p:nvPr/>
         </p:nvSpPr>
         <p:spPr>
           <a:xfrm>
-            <a:off x="8503920" y="6492240"/>
-            <a:ext cx="457200" cy="274320"/>
+            <a:off x="8229600" y="6492240"/>
+            <a:ext cx="731520" cy="274320"/>
           </a:xfrm>
           <a:prstGeom prst="rect">
             <a:avLst/>
@@ -5123,14 +5896,14 @@
           <a:lstStyle/>
           <a:p>
             <a:pPr algn="r">
-              <a:defRPr sz="1000">
+              <a:defRPr sz="1200">
                 <a:solidFill>
                   <a:srgbClr val="969696"/>
                 </a:solidFill>
               </a:defRPr>
             </a:pPr>
             <a:r>
-              <a:t>3/12</a:t>
+              <a:t>3/14</a:t>
             </a:r>
           </a:p>
         </p:txBody>
@@ -5162,13 +5935,13 @@
         <p:spPr>
           <a:xfrm>
             <a:off x="0" y="0"/>
-            <a:ext cx="9144000" cy="1005840"/>
+            <a:ext cx="9144000" cy="1188720"/>
           </a:xfrm>
           <a:prstGeom prst="rect">
             <a:avLst/>
           </a:prstGeom>
           <a:solidFill>
-            <a:srgbClr val="00529B"/>
+            <a:srgbClr val="1E3C72"/>
           </a:solidFill>
           <a:ln>
             <a:noFill/>
@@ -5204,8 +5977,8 @@
         </p:nvSpPr>
         <p:spPr>
           <a:xfrm>
-            <a:off x="457200" y="228600"/>
-            <a:ext cx="8229600" cy="640080"/>
+            <a:off x="548640" y="274320"/>
+            <a:ext cx="8229600" cy="731520"/>
           </a:xfrm>
           <a:prstGeom prst="rect">
             <a:avLst/>
@@ -5219,14 +5992,14 @@
           <a:lstStyle/>
           <a:p>
             <a:pPr>
-              <a:defRPr sz="2800" b="1">
+              <a:defRPr sz="3000" b="1">
                 <a:solidFill>
                   <a:srgbClr val="FFFFFF"/>
                 </a:solidFill>
               </a:defRPr>
             </a:pPr>
             <a:r>
-              <a:t>第七十四章 · 民不畏死</a:t>
+              <a:t>第七十六章 · 逐句释义</a:t>
             </a:r>
           </a:p>
         </p:txBody>
@@ -5239,14 +6012,14 @@
         </p:nvSpPr>
         <p:spPr>
           <a:xfrm>
-            <a:off x="457200" y="1280160"/>
-            <a:ext cx="8229600" cy="3657600"/>
+            <a:off x="457200" y="1371600"/>
+            <a:ext cx="8229600" cy="1143000"/>
           </a:xfrm>
           <a:prstGeom prst="roundRect">
             <a:avLst/>
           </a:prstGeom>
           <a:solidFill>
-            <a:srgbClr val="F2F6FA"/>
+            <a:srgbClr val="F5F7FA"/>
           </a:solidFill>
         </p:spPr>
         <p:style>
@@ -5268,198 +6041,235 @@
           <a:lstStyle/>
           <a:p>
             <a:pPr algn="ctr">
-              <a:defRPr sz="1600">
-                <a:solidFill>
-                  <a:srgbClr val="00529B"/>
-                </a:solidFill>
-                <a:latin typeface="SimSun"/>
-              </a:defRPr>
-            </a:pPr>
-            <a:r>
-              <a:t>民不畏死，</a:t>
-            </a:r>
-          </a:p>
-          <a:p>
-            <a:pPr>
-              <a:defRPr sz="1600">
-                <a:solidFill>
-                  <a:srgbClr val="00529B"/>
-                </a:solidFill>
-                <a:latin typeface="SimSun"/>
-              </a:defRPr>
-            </a:pPr>
-            <a:r>
-              <a:t>奈何以死惧之？</a:t>
-            </a:r>
-          </a:p>
-          <a:p>
-            <a:pPr>
-              <a:defRPr sz="1600">
-                <a:solidFill>
-                  <a:srgbClr val="00529B"/>
-                </a:solidFill>
-                <a:latin typeface="SimSun"/>
-              </a:defRPr>
-            </a:pPr>
-          </a:p>
-          <a:p>
-            <a:pPr>
-              <a:defRPr sz="1600">
-                <a:solidFill>
-                  <a:srgbClr val="00529B"/>
-                </a:solidFill>
-                <a:latin typeface="SimSun"/>
-              </a:defRPr>
-            </a:pPr>
-            <a:r>
-              <a:t>若使民常畏死，</a:t>
-            </a:r>
-          </a:p>
-          <a:p>
-            <a:pPr>
-              <a:defRPr sz="1600">
-                <a:solidFill>
-                  <a:srgbClr val="00529B"/>
-                </a:solidFill>
-                <a:latin typeface="SimSun"/>
-              </a:defRPr>
-            </a:pPr>
-            <a:r>
-              <a:t>而为奇者，吾得执而杀之，孰敢？</a:t>
-            </a:r>
-          </a:p>
-          <a:p>
-            <a:pPr>
-              <a:defRPr sz="1600">
-                <a:solidFill>
-                  <a:srgbClr val="00529B"/>
-                </a:solidFill>
-                <a:latin typeface="SimSun"/>
-              </a:defRPr>
-            </a:pPr>
-          </a:p>
-          <a:p>
-            <a:pPr>
-              <a:defRPr sz="1600">
-                <a:solidFill>
-                  <a:srgbClr val="00529B"/>
-                </a:solidFill>
-                <a:latin typeface="SimSun"/>
-              </a:defRPr>
-            </a:pPr>
-            <a:r>
-              <a:t>常有司杀者杀。</a:t>
-            </a:r>
-          </a:p>
-          <a:p>
-            <a:pPr>
-              <a:defRPr sz="1600">
-                <a:solidFill>
-                  <a:srgbClr val="00529B"/>
-                </a:solidFill>
-                <a:latin typeface="SimSun"/>
-              </a:defRPr>
-            </a:pPr>
-            <a:r>
-              <a:t>夫代司杀者杀，</a:t>
-            </a:r>
-          </a:p>
-          <a:p>
-            <a:pPr>
-              <a:defRPr sz="1600">
-                <a:solidFill>
-                  <a:srgbClr val="00529B"/>
-                </a:solidFill>
-                <a:latin typeface="SimSun"/>
-              </a:defRPr>
-            </a:pPr>
-            <a:r>
-              <a:t>是谓代大匠斫。</a:t>
-            </a:r>
-          </a:p>
-          <a:p>
-            <a:pPr>
-              <a:defRPr sz="1600">
-                <a:solidFill>
-                  <a:srgbClr val="00529B"/>
-                </a:solidFill>
-                <a:latin typeface="SimSun"/>
-              </a:defRPr>
-            </a:pPr>
-          </a:p>
-          <a:p>
-            <a:pPr>
-              <a:defRPr sz="1600">
-                <a:solidFill>
-                  <a:srgbClr val="00529B"/>
-                </a:solidFill>
-                <a:latin typeface="SimSun"/>
-              </a:defRPr>
-            </a:pPr>
-            <a:r>
-              <a:t>夫代大匠斫者，</a:t>
-            </a:r>
-          </a:p>
-          <a:p>
-            <a:pPr>
-              <a:defRPr sz="1600">
-                <a:solidFill>
-                  <a:srgbClr val="00529B"/>
-                </a:solidFill>
-                <a:latin typeface="SimSun"/>
-              </a:defRPr>
-            </a:pPr>
-            <a:r>
-              <a:t>希有不伤其手矣。</a:t>
-            </a:r>
-          </a:p>
-        </p:txBody>
-      </p:sp>
-      <p:sp>
-        <p:nvSpPr>
-          <p:cNvPr id="5" name="TextBox 4"/>
+              <a:defRPr sz="1700" b="1">
+                <a:solidFill>
+                  <a:srgbClr val="1E3C72"/>
+                </a:solidFill>
+              </a:defRPr>
+            </a:pPr>
+            <a:r>
+              <a:t>① 人之生也柔弱，其死也坚强</a:t>
+            </a:r>
+          </a:p>
+          <a:p>
+            <a:pPr>
+              <a:spcBef>
+                <a:spcPts val="400"/>
+              </a:spcBef>
+              <a:defRPr sz="1500">
+                <a:solidFill>
+                  <a:srgbClr val="333333"/>
+                </a:solidFill>
+              </a:defRPr>
+            </a:pPr>
+            <a:r>
+              <a:t>人活着时身体柔软灵活，死了则僵硬——柔弱是生命力的象征，坚强是死亡的预兆。</a:t>
+            </a:r>
+          </a:p>
+        </p:txBody>
+      </p:sp>
+      <p:sp>
+        <p:nvSpPr>
+          <p:cNvPr id="5" name="Rounded Rectangle 4"/>
+          <p:cNvSpPr/>
+          <p:nvPr/>
+        </p:nvSpPr>
+        <p:spPr>
+          <a:xfrm>
+            <a:off x="457200" y="2606040"/>
+            <a:ext cx="8229600" cy="1143000"/>
+          </a:xfrm>
+          <a:prstGeom prst="roundRect">
+            <a:avLst/>
+          </a:prstGeom>
+          <a:solidFill>
+            <a:srgbClr val="F5F7FA"/>
+          </a:solidFill>
+        </p:spPr>
+        <p:style>
+          <a:lnRef idx="1">
+            <a:schemeClr val="accent1"/>
+          </a:lnRef>
+          <a:fillRef idx="3">
+            <a:schemeClr val="accent1"/>
+          </a:fillRef>
+          <a:effectRef idx="2">
+            <a:schemeClr val="accent1"/>
+          </a:effectRef>
+          <a:fontRef idx="minor">
+            <a:schemeClr val="lt1"/>
+          </a:fontRef>
+        </p:style>
+        <p:txBody>
+          <a:bodyPr rtlCol="0" anchor="ctr" wrap="square"/>
+          <a:lstStyle/>
+          <a:p>
+            <a:pPr algn="ctr">
+              <a:defRPr sz="1700" b="1">
+                <a:solidFill>
+                  <a:srgbClr val="1E3C72"/>
+                </a:solidFill>
+              </a:defRPr>
+            </a:pPr>
+            <a:r>
+              <a:t>② 万物草木之生也柔脆，其死也枯槁</a:t>
+            </a:r>
+          </a:p>
+          <a:p>
+            <a:pPr>
+              <a:spcBef>
+                <a:spcPts val="400"/>
+              </a:spcBef>
+              <a:defRPr sz="1500">
+                <a:solidFill>
+                  <a:srgbClr val="333333"/>
+                </a:solidFill>
+              </a:defRPr>
+            </a:pPr>
+            <a:r>
+              <a:t>草木活着时枝条柔韧，死了则干枯——自然万物无一例外，柔弱代表生机，枯槁代表死亡。</a:t>
+            </a:r>
+          </a:p>
+        </p:txBody>
+      </p:sp>
+      <p:sp>
+        <p:nvSpPr>
+          <p:cNvPr id="6" name="Rounded Rectangle 5"/>
+          <p:cNvSpPr/>
+          <p:nvPr/>
+        </p:nvSpPr>
+        <p:spPr>
+          <a:xfrm>
+            <a:off x="457200" y="3840480"/>
+            <a:ext cx="8229600" cy="1143000"/>
+          </a:xfrm>
+          <a:prstGeom prst="roundRect">
+            <a:avLst/>
+          </a:prstGeom>
+          <a:solidFill>
+            <a:srgbClr val="F5F7FA"/>
+          </a:solidFill>
+        </p:spPr>
+        <p:style>
+          <a:lnRef idx="1">
+            <a:schemeClr val="accent1"/>
+          </a:lnRef>
+          <a:fillRef idx="3">
+            <a:schemeClr val="accent1"/>
+          </a:fillRef>
+          <a:effectRef idx="2">
+            <a:schemeClr val="accent1"/>
+          </a:effectRef>
+          <a:fontRef idx="minor">
+            <a:schemeClr val="lt1"/>
+          </a:fontRef>
+        </p:style>
+        <p:txBody>
+          <a:bodyPr rtlCol="0" anchor="ctr" wrap="square"/>
+          <a:lstStyle/>
+          <a:p>
+            <a:pPr algn="ctr">
+              <a:defRPr sz="1700" b="1">
+                <a:solidFill>
+                  <a:srgbClr val="1E3C72"/>
+                </a:solidFill>
+              </a:defRPr>
+            </a:pPr>
+            <a:r>
+              <a:t>③ 坚强者死之徒，柔弱者生之徒</a:t>
+            </a:r>
+          </a:p>
+          <a:p>
+            <a:pPr>
+              <a:spcBef>
+                <a:spcPts val="400"/>
+              </a:spcBef>
+              <a:defRPr sz="1500">
+                <a:solidFill>
+                  <a:srgbClr val="333333"/>
+                </a:solidFill>
+              </a:defRPr>
+            </a:pPr>
+            <a:r>
+              <a:t>属于坚强一类的是死亡之旅，属于柔弱一类的是生存之旅——老子揭示了强弱转化的辩证法则。</a:t>
+            </a:r>
+          </a:p>
+        </p:txBody>
+      </p:sp>
+      <p:sp>
+        <p:nvSpPr>
+          <p:cNvPr id="7" name="Rounded Rectangle 6"/>
+          <p:cNvSpPr/>
+          <p:nvPr/>
+        </p:nvSpPr>
+        <p:spPr>
+          <a:xfrm>
+            <a:off x="457200" y="5074920"/>
+            <a:ext cx="8229600" cy="1143000"/>
+          </a:xfrm>
+          <a:prstGeom prst="roundRect">
+            <a:avLst/>
+          </a:prstGeom>
+          <a:solidFill>
+            <a:srgbClr val="F5F7FA"/>
+          </a:solidFill>
+        </p:spPr>
+        <p:style>
+          <a:lnRef idx="1">
+            <a:schemeClr val="accent1"/>
+          </a:lnRef>
+          <a:fillRef idx="3">
+            <a:schemeClr val="accent1"/>
+          </a:fillRef>
+          <a:effectRef idx="2">
+            <a:schemeClr val="accent1"/>
+          </a:effectRef>
+          <a:fontRef idx="minor">
+            <a:schemeClr val="lt1"/>
+          </a:fontRef>
+        </p:style>
+        <p:txBody>
+          <a:bodyPr rtlCol="0" anchor="ctr" wrap="square"/>
+          <a:lstStyle/>
+          <a:p>
+            <a:pPr algn="ctr">
+              <a:defRPr sz="1700" b="1">
+                <a:solidFill>
+                  <a:srgbClr val="1E3C72"/>
+                </a:solidFill>
+              </a:defRPr>
+            </a:pPr>
+            <a:r>
+              <a:t>④ 强大处下，柔弱处上</a:t>
+            </a:r>
+          </a:p>
+          <a:p>
+            <a:pPr>
+              <a:spcBef>
+                <a:spcPts val="400"/>
+              </a:spcBef>
+              <a:defRPr sz="1500">
+                <a:solidFill>
+                  <a:srgbClr val="333333"/>
+                </a:solidFill>
+              </a:defRPr>
+            </a:pPr>
+            <a:r>
+              <a:t>强大的反而处于下方，柔弱的反而处于上方——柔弱不是软弱，而是更具生命力的状态。</a:t>
+            </a:r>
+          </a:p>
+        </p:txBody>
+      </p:sp>
+      <p:sp>
+        <p:nvSpPr>
+          <p:cNvPr id="8" name="TextBox 7"/>
           <p:cNvSpPr txBox="1"/>
           <p:nvPr/>
         </p:nvSpPr>
         <p:spPr>
           <a:xfrm>
-            <a:off x="457200" y="5029200"/>
-            <a:ext cx="8229600" cy="1828800"/>
-          </a:xfrm>
-          <a:prstGeom prst="rect">
-            <a:avLst/>
-          </a:prstGeom>
-          <a:noFill/>
-        </p:spPr>
-        <p:txBody>
-          <a:bodyPr wrap="square">
-            <a:spAutoFit/>
-          </a:bodyPr>
-          <a:lstStyle/>
-          <a:p>
-            <a:pPr>
-              <a:defRPr sz="1300">
-                <a:solidFill>
-                  <a:srgbClr val="333333"/>
-                </a:solidFill>
-              </a:defRPr>
-            </a:pPr>
-            <a:r>
-              <a:t>【白话解读】人民不怕死，为什么还要用死来吓唬他们？如果让人民经常害怕死亡，而对那些作恶的人，我能够把他们抓来杀掉，谁还敢作恶？通常负责杀人的是司杀者。代替司杀者去杀人，就像代替木匠去砍木头。代替木匠砍木头的人，很少有不伤到自己手的。</a:t>
-            </a:r>
-          </a:p>
-        </p:txBody>
-      </p:sp>
-      <p:sp>
-        <p:nvSpPr>
-          <p:cNvPr id="6" name="TextBox 5"/>
-          <p:cNvSpPr txBox="1"/>
-          <p:nvPr/>
-        </p:nvSpPr>
-        <p:spPr>
-          <a:xfrm>
-            <a:off x="8503920" y="6492240"/>
-            <a:ext cx="457200" cy="274320"/>
+            <a:off x="8229600" y="6492240"/>
+            <a:ext cx="731520" cy="274320"/>
           </a:xfrm>
           <a:prstGeom prst="rect">
             <a:avLst/>
@@ -5473,14 +6283,14 @@
           <a:lstStyle/>
           <a:p>
             <a:pPr algn="r">
-              <a:defRPr sz="1000">
+              <a:defRPr sz="1200">
                 <a:solidFill>
                   <a:srgbClr val="969696"/>
                 </a:solidFill>
               </a:defRPr>
             </a:pPr>
             <a:r>
-              <a:t>4/12</a:t>
+              <a:t>4/14</a:t>
             </a:r>
           </a:p>
         </p:txBody>
@@ -5512,13 +6322,13 @@
         <p:spPr>
           <a:xfrm>
             <a:off x="0" y="0"/>
-            <a:ext cx="9144000" cy="1005840"/>
+            <a:ext cx="9144000" cy="1188720"/>
           </a:xfrm>
           <a:prstGeom prst="rect">
             <a:avLst/>
           </a:prstGeom>
           <a:solidFill>
-            <a:srgbClr val="00529B"/>
+            <a:srgbClr val="1E3C72"/>
           </a:solidFill>
           <a:ln>
             <a:noFill/>
@@ -5554,8 +6364,8 @@
         </p:nvSpPr>
         <p:spPr>
           <a:xfrm>
-            <a:off x="457200" y="228600"/>
-            <a:ext cx="8229600" cy="640080"/>
+            <a:off x="548640" y="274320"/>
+            <a:ext cx="8229600" cy="731520"/>
           </a:xfrm>
           <a:prstGeom prst="rect">
             <a:avLst/>
@@ -5569,14 +6379,14 @@
           <a:lstStyle/>
           <a:p>
             <a:pPr>
-              <a:defRPr sz="2800" b="1">
+              <a:defRPr sz="3000" b="1">
                 <a:solidFill>
                   <a:srgbClr val="FFFFFF"/>
                 </a:solidFill>
               </a:defRPr>
             </a:pPr>
             <a:r>
-              <a:t>第七十四章 · 核心思想</a:t>
+              <a:t>第七十六章 · 本章小结</a:t>
             </a:r>
           </a:p>
         </p:txBody>
@@ -5589,14 +6399,14 @@
         </p:nvSpPr>
         <p:spPr>
           <a:xfrm>
-            <a:off x="457200" y="1188720"/>
-            <a:ext cx="8229600" cy="1097280"/>
+            <a:off x="457200" y="1371600"/>
+            <a:ext cx="8229600" cy="1280160"/>
           </a:xfrm>
           <a:prstGeom prst="roundRect">
             <a:avLst/>
           </a:prstGeom>
           <a:solidFill>
-            <a:srgbClr val="007AC2"/>
+            <a:srgbClr val="4682B4"/>
           </a:solidFill>
         </p:spPr>
         <p:style>
@@ -5630,14 +6440,14 @@
           </a:p>
           <a:p>
             <a:pPr>
-              <a:defRPr sz="1400">
-                <a:solidFill>
-                  <a:srgbClr val="E6E6E6"/>
-                </a:solidFill>
-              </a:defRPr>
-            </a:pPr>
-            <a:r>
-              <a:t>民不畏死，奈何以死惧之——当人民不再怕死时，严刑峻法就失去了威慑力。统治者不应代替天道去惩罚，而应顺应自然规律。</a:t>
+              <a:defRPr sz="1500">
+                <a:solidFill>
+                  <a:srgbClr val="FFFFFF"/>
+                </a:solidFill>
+              </a:defRPr>
+            </a:pPr>
+            <a:r>
+              <a:t>柔弱胜刚强——生命的力量不在于强硬，而在于柔韧。真正强大的，是那些懂得示弱、保持柔顺的人。</a:t>
             </a:r>
           </a:p>
         </p:txBody>
@@ -5650,14 +6460,14 @@
         </p:nvSpPr>
         <p:spPr>
           <a:xfrm>
-            <a:off x="457200" y="2377440"/>
-            <a:ext cx="8229600" cy="914400"/>
+            <a:off x="457200" y="2834640"/>
+            <a:ext cx="8229600" cy="1143000"/>
           </a:xfrm>
           <a:prstGeom prst="roundRect">
             <a:avLst/>
           </a:prstGeom>
           <a:solidFill>
-            <a:srgbClr val="F2F6FA"/>
+            <a:srgbClr val="F5F7FA"/>
           </a:solidFill>
         </p:spPr>
         <p:style>
@@ -5679,26 +6489,29 @@
           <a:lstStyle/>
           <a:p>
             <a:pPr algn="ctr">
-              <a:defRPr sz="1400" b="1">
-                <a:solidFill>
-                  <a:srgbClr val="00529B"/>
-                </a:solidFill>
-              </a:defRPr>
-            </a:pPr>
-            <a:r>
-              <a:t>1. 民不畏死</a:t>
-            </a:r>
-          </a:p>
-          <a:p>
-            <a:pPr>
-              <a:defRPr sz="1200">
+              <a:defRPr sz="1700" b="1">
+                <a:solidFill>
+                  <a:srgbClr val="1E3C72"/>
+                </a:solidFill>
+              </a:defRPr>
+            </a:pPr>
+            <a:r>
+              <a:t>1. 柔弱代表生机</a:t>
+            </a:r>
+          </a:p>
+          <a:p>
+            <a:pPr>
+              <a:spcBef>
+                <a:spcPts val="400"/>
+              </a:spcBef>
+              <a:defRPr sz="1500">
                 <a:solidFill>
                   <a:srgbClr val="333333"/>
                 </a:solidFill>
               </a:defRPr>
             </a:pPr>
             <a:r>
-              <a:t>当人民被逼到不怕死的境地时，统治者用死亡威胁他们已经没有用了——官逼民反。</a:t>
+              <a:t>人活着时柔弱，死了才僵硬——柔弱是生命力的体现，是活力的象征。</a:t>
             </a:r>
           </a:p>
         </p:txBody>
@@ -5711,14 +6524,14 @@
         </p:nvSpPr>
         <p:spPr>
           <a:xfrm>
-            <a:off x="457200" y="3383280"/>
-            <a:ext cx="8229600" cy="914400"/>
+            <a:off x="457200" y="4069080"/>
+            <a:ext cx="8229600" cy="1143000"/>
           </a:xfrm>
           <a:prstGeom prst="roundRect">
             <a:avLst/>
           </a:prstGeom>
           <a:solidFill>
-            <a:srgbClr val="F2F6FA"/>
+            <a:srgbClr val="F5F7FA"/>
           </a:solidFill>
         </p:spPr>
         <p:style>
@@ -5740,26 +6553,29 @@
           <a:lstStyle/>
           <a:p>
             <a:pPr algn="ctr">
-              <a:defRPr sz="1400" b="1">
-                <a:solidFill>
-                  <a:srgbClr val="00529B"/>
-                </a:solidFill>
-              </a:defRPr>
-            </a:pPr>
-            <a:r>
-              <a:t>2. 司杀者杀</a:t>
-            </a:r>
-          </a:p>
-          <a:p>
-            <a:pPr>
-              <a:defRPr sz="1200">
+              <a:defRPr sz="1700" b="1">
+                <a:solidFill>
+                  <a:srgbClr val="1E3C72"/>
+                </a:solidFill>
+              </a:defRPr>
+            </a:pPr>
+            <a:r>
+              <a:t>2. 坚强属于死亡</a:t>
+            </a:r>
+          </a:p>
+          <a:p>
+            <a:pPr>
+              <a:spcBef>
+                <a:spcPts val="400"/>
+              </a:spcBef>
+              <a:defRPr sz="1500">
                 <a:solidFill>
                   <a:srgbClr val="333333"/>
                 </a:solidFill>
               </a:defRPr>
             </a:pPr>
             <a:r>
-              <a:t>上天才是真正的审判者，统治者不应越俎代庖——尊重自然法则。</a:t>
+              <a:t>坚强的事物最终都会走向消亡——过于强硬反而会招致失败。</a:t>
             </a:r>
           </a:p>
         </p:txBody>
@@ -5772,14 +6588,14 @@
         </p:nvSpPr>
         <p:spPr>
           <a:xfrm>
-            <a:off x="457200" y="4389120"/>
-            <a:ext cx="8229600" cy="914400"/>
+            <a:off x="457200" y="5303520"/>
+            <a:ext cx="8229600" cy="1143000"/>
           </a:xfrm>
           <a:prstGeom prst="roundRect">
             <a:avLst/>
           </a:prstGeom>
           <a:solidFill>
-            <a:srgbClr val="F2F6FA"/>
+            <a:srgbClr val="F5F7FA"/>
           </a:solidFill>
         </p:spPr>
         <p:style>
@@ -5801,26 +6617,29 @@
           <a:lstStyle/>
           <a:p>
             <a:pPr algn="ctr">
-              <a:defRPr sz="1400" b="1">
-                <a:solidFill>
-                  <a:srgbClr val="00529B"/>
-                </a:solidFill>
-              </a:defRPr>
-            </a:pPr>
-            <a:r>
-              <a:t>3. 代大匠斫</a:t>
-            </a:r>
-          </a:p>
-          <a:p>
-            <a:pPr>
-              <a:defRPr sz="1200">
+              <a:defRPr sz="1700" b="1">
+                <a:solidFill>
+                  <a:srgbClr val="1E3C72"/>
+                </a:solidFill>
+              </a:defRPr>
+            </a:pPr>
+            <a:r>
+              <a:t>3. 兵强则不胜</a:t>
+            </a:r>
+          </a:p>
+          <a:p>
+            <a:pPr>
+              <a:spcBef>
+                <a:spcPts val="400"/>
+              </a:spcBef>
+              <a:defRPr sz="1500">
                 <a:solidFill>
                   <a:srgbClr val="333333"/>
                 </a:solidFill>
               </a:defRPr>
             </a:pPr>
             <a:r>
-              <a:t>代替天道执法者，往往会伤到自己——越权行事必有后患。</a:t>
+              <a:t>军队过于强硬反而无法获胜——逞强不是力量，柔韧才是真正的强大。</a:t>
             </a:r>
           </a:p>
         </p:txBody>
@@ -5833,14 +6652,14 @@
         </p:nvSpPr>
         <p:spPr>
           <a:xfrm>
-            <a:off x="457200" y="5394960"/>
-            <a:ext cx="8229600" cy="914400"/>
+            <a:off x="457200" y="6537960"/>
+            <a:ext cx="8229600" cy="1143000"/>
           </a:xfrm>
           <a:prstGeom prst="roundRect">
             <a:avLst/>
           </a:prstGeom>
           <a:solidFill>
-            <a:srgbClr val="F2F6FA"/>
+            <a:srgbClr val="F5F7FA"/>
           </a:solidFill>
         </p:spPr>
         <p:style>
@@ -5862,26 +6681,29 @@
           <a:lstStyle/>
           <a:p>
             <a:pPr algn="ctr">
-              <a:defRPr sz="1400" b="1">
-                <a:solidFill>
-                  <a:srgbClr val="00529B"/>
-                </a:solidFill>
-              </a:defRPr>
-            </a:pPr>
-            <a:r>
-              <a:t>4. 反思法治</a:t>
-            </a:r>
-          </a:p>
-          <a:p>
-            <a:pPr>
-              <a:defRPr sz="1200">
+              <a:defRPr sz="1700" b="1">
+                <a:solidFill>
+                  <a:srgbClr val="1E3C72"/>
+                </a:solidFill>
+              </a:defRPr>
+            </a:pPr>
+            <a:r>
+              <a:t>4. 强大处下</a:t>
+            </a:r>
+          </a:p>
+          <a:p>
+            <a:pPr>
+              <a:spcBef>
+                <a:spcPts val="400"/>
+              </a:spcBef>
+              <a:defRPr sz="1500">
                 <a:solidFill>
                   <a:srgbClr val="333333"/>
                 </a:solidFill>
               </a:defRPr>
             </a:pPr>
             <a:r>
-              <a:t>单纯依靠严刑峻法无法长治久安——要从根本上解决民生问题。</a:t>
+              <a:t>真正强大的人懂得处下——处下不是软弱，而是智慧。</a:t>
             </a:r>
           </a:p>
         </p:txBody>
@@ -5894,8 +6716,8 @@
         </p:nvSpPr>
         <p:spPr>
           <a:xfrm>
-            <a:off x="8503920" y="6492240"/>
-            <a:ext cx="457200" cy="274320"/>
+            <a:off x="8229600" y="6492240"/>
+            <a:ext cx="731520" cy="274320"/>
           </a:xfrm>
           <a:prstGeom prst="rect">
             <a:avLst/>
@@ -5909,14 +6731,14 @@
           <a:lstStyle/>
           <a:p>
             <a:pPr algn="r">
-              <a:defRPr sz="1000">
+              <a:defRPr sz="1200">
                 <a:solidFill>
                   <a:srgbClr val="969696"/>
                 </a:solidFill>
               </a:defRPr>
             </a:pPr>
             <a:r>
-              <a:t>5/12</a:t>
+              <a:t>5/14</a:t>
             </a:r>
           </a:p>
         </p:txBody>
@@ -5948,13 +6770,13 @@
         <p:spPr>
           <a:xfrm>
             <a:off x="0" y="0"/>
-            <a:ext cx="9144000" cy="1005840"/>
+            <a:ext cx="9144000" cy="1188720"/>
           </a:xfrm>
           <a:prstGeom prst="rect">
             <a:avLst/>
           </a:prstGeom>
           <a:solidFill>
-            <a:srgbClr val="00529B"/>
+            <a:srgbClr val="1E3C72"/>
           </a:solidFill>
           <a:ln>
             <a:noFill/>
@@ -5990,8 +6812,8 @@
         </p:nvSpPr>
         <p:spPr>
           <a:xfrm>
-            <a:off x="457200" y="228600"/>
-            <a:ext cx="8229600" cy="640080"/>
+            <a:off x="548640" y="274320"/>
+            <a:ext cx="8229600" cy="731520"/>
           </a:xfrm>
           <a:prstGeom prst="rect">
             <a:avLst/>
@@ -6005,14 +6827,14 @@
           <a:lstStyle/>
           <a:p>
             <a:pPr>
-              <a:defRPr sz="2800" b="1">
+              <a:defRPr sz="3000" b="1">
                 <a:solidFill>
                   <a:srgbClr val="FFFFFF"/>
                 </a:solidFill>
               </a:defRPr>
             </a:pPr>
             <a:r>
-              <a:t>第七十五章 · 民之饥</a:t>
+              <a:t>第七十七章 · 柔弱处上</a:t>
             </a:r>
           </a:p>
         </p:txBody>
@@ -6025,15 +6847,20 @@
         </p:nvSpPr>
         <p:spPr>
           <a:xfrm>
-            <a:off x="457200" y="1280160"/>
-            <a:ext cx="8229600" cy="3657600"/>
+            <a:off x="457200" y="1371600"/>
+            <a:ext cx="8229600" cy="4114800"/>
           </a:xfrm>
           <a:prstGeom prst="roundRect">
             <a:avLst/>
           </a:prstGeom>
           <a:solidFill>
-            <a:srgbClr val="F2F6FA"/>
+            <a:srgbClr val="14233C"/>
           </a:solidFill>
+          <a:ln>
+            <a:solidFill>
+              <a:srgbClr val="1E3C72"/>
+            </a:solidFill>
+          </a:ln>
         </p:spPr>
         <p:style>
           <a:lnRef idx="1">
@@ -6054,171 +6881,293 @@
           <a:lstStyle/>
           <a:p>
             <a:pPr algn="ctr">
-              <a:defRPr sz="1600">
-                <a:solidFill>
-                  <a:srgbClr val="00529B"/>
-                </a:solidFill>
-                <a:latin typeface="SimSun"/>
-              </a:defRPr>
-            </a:pPr>
-            <a:r>
-              <a:t>民之饥，</a:t>
-            </a:r>
-          </a:p>
-          <a:p>
-            <a:pPr>
-              <a:defRPr sz="1600">
-                <a:solidFill>
-                  <a:srgbClr val="00529B"/>
-                </a:solidFill>
-                <a:latin typeface="SimSun"/>
-              </a:defRPr>
-            </a:pPr>
-            <a:r>
-              <a:t>以其上食税之多，是以饥。</a:t>
-            </a:r>
-          </a:p>
-          <a:p>
-            <a:pPr>
-              <a:defRPr sz="1600">
-                <a:solidFill>
-                  <a:srgbClr val="00529B"/>
-                </a:solidFill>
-                <a:latin typeface="SimSun"/>
-              </a:defRPr>
-            </a:pPr>
-          </a:p>
-          <a:p>
-            <a:pPr>
-              <a:defRPr sz="1600">
-                <a:solidFill>
-                  <a:srgbClr val="00529B"/>
-                </a:solidFill>
-                <a:latin typeface="SimSun"/>
-              </a:defRPr>
-            </a:pPr>
-            <a:r>
-              <a:t>民之难治，</a:t>
-            </a:r>
-          </a:p>
-          <a:p>
-            <a:pPr>
-              <a:defRPr sz="1600">
-                <a:solidFill>
-                  <a:srgbClr val="00529B"/>
-                </a:solidFill>
-                <a:latin typeface="SimSun"/>
-              </a:defRPr>
-            </a:pPr>
-            <a:r>
-              <a:t>以其上之有为，是以难治。</a:t>
-            </a:r>
-          </a:p>
-          <a:p>
-            <a:pPr>
-              <a:defRPr sz="1600">
-                <a:solidFill>
-                  <a:srgbClr val="00529B"/>
-                </a:solidFill>
-                <a:latin typeface="SimSun"/>
-              </a:defRPr>
-            </a:pPr>
-          </a:p>
-          <a:p>
-            <a:pPr>
-              <a:defRPr sz="1600">
-                <a:solidFill>
-                  <a:srgbClr val="00529B"/>
-                </a:solidFill>
-                <a:latin typeface="SimSun"/>
-              </a:defRPr>
-            </a:pPr>
-            <a:r>
-              <a:t>民之轻死，</a:t>
-            </a:r>
-          </a:p>
-          <a:p>
-            <a:pPr>
-              <a:defRPr sz="1600">
-                <a:solidFill>
-                  <a:srgbClr val="00529B"/>
-                </a:solidFill>
-                <a:latin typeface="SimSun"/>
-              </a:defRPr>
-            </a:pPr>
-            <a:r>
-              <a:t>以其求生之厚，是以轻死。</a:t>
-            </a:r>
-          </a:p>
-          <a:p>
-            <a:pPr>
-              <a:defRPr sz="1600">
-                <a:solidFill>
-                  <a:srgbClr val="00529B"/>
-                </a:solidFill>
-                <a:latin typeface="SimSun"/>
-              </a:defRPr>
-            </a:pPr>
-          </a:p>
-          <a:p>
-            <a:pPr>
-              <a:defRPr sz="1600">
-                <a:solidFill>
-                  <a:srgbClr val="00529B"/>
-                </a:solidFill>
-                <a:latin typeface="SimSun"/>
-              </a:defRPr>
-            </a:pPr>
-            <a:r>
-              <a:t>夫唯无以生为者，</a:t>
-            </a:r>
-          </a:p>
-          <a:p>
-            <a:pPr>
-              <a:defRPr sz="1600">
-                <a:solidFill>
-                  <a:srgbClr val="00529B"/>
-                </a:solidFill>
-                <a:latin typeface="SimSun"/>
-              </a:defRPr>
-            </a:pPr>
-            <a:r>
-              <a:t>是贤于贵生。</a:t>
-            </a:r>
-          </a:p>
-        </p:txBody>
-      </p:sp>
-      <p:sp>
-        <p:nvSpPr>
-          <p:cNvPr id="5" name="TextBox 4"/>
-          <p:cNvSpPr txBox="1"/>
-          <p:nvPr/>
-        </p:nvSpPr>
-        <p:spPr>
-          <a:xfrm>
-            <a:off x="457200" y="5029200"/>
-            <a:ext cx="8229600" cy="1828800"/>
-          </a:xfrm>
-          <a:prstGeom prst="rect">
-            <a:avLst/>
-          </a:prstGeom>
-          <a:noFill/>
-        </p:spPr>
-        <p:txBody>
-          <a:bodyPr wrap="square">
-            <a:spAutoFit/>
-          </a:bodyPr>
-          <a:lstStyle/>
-          <a:p>
-            <a:pPr>
-              <a:defRPr sz="1200">
+              <a:defRPr sz="1600" b="1">
+                <a:solidFill>
+                  <a:srgbClr val="4682B4"/>
+                </a:solidFill>
+              </a:defRPr>
+            </a:pPr>
+            <a:r>
+              <a:t>【原文】</a:t>
+            </a:r>
+          </a:p>
+          <a:p>
+            <a:pPr>
+              <a:spcBef>
+                <a:spcPts val="300"/>
+              </a:spcBef>
+              <a:defRPr sz="2200">
+                <a:solidFill>
+                  <a:srgbClr val="FFFFFF"/>
+                </a:solidFill>
+              </a:defRPr>
+            </a:pPr>
+            <a:r>
+              <a:t>天下之至柔，驰骋天下之至坚。</a:t>
+            </a:r>
+          </a:p>
+          <a:p>
+            <a:pPr>
+              <a:spcBef>
+                <a:spcPts val="300"/>
+              </a:spcBef>
+              <a:defRPr sz="2200">
+                <a:solidFill>
+                  <a:srgbClr val="FFFFFF"/>
+                </a:solidFill>
+              </a:defRPr>
+            </a:pPr>
+            <a:r>
+              <a:t>无有入无间。</a:t>
+            </a:r>
+          </a:p>
+          <a:p>
+            <a:pPr>
+              <a:spcBef>
+                <a:spcPts val="300"/>
+              </a:spcBef>
+              <a:defRPr sz="2200">
+                <a:solidFill>
+                  <a:srgbClr val="FFFFFF"/>
+                </a:solidFill>
+              </a:defRPr>
+            </a:pPr>
+            <a:r>
+              <a:t>　</a:t>
+            </a:r>
+          </a:p>
+          <a:p>
+            <a:pPr>
+              <a:spcBef>
+                <a:spcPts val="300"/>
+              </a:spcBef>
+              <a:defRPr sz="2200">
+                <a:solidFill>
+                  <a:srgbClr val="FFFFFF"/>
+                </a:solidFill>
+              </a:defRPr>
+            </a:pPr>
+            <a:r>
+              <a:t>吾是以知无为之有益。</a:t>
+            </a:r>
+          </a:p>
+          <a:p>
+            <a:pPr>
+              <a:spcBef>
+                <a:spcPts val="300"/>
+              </a:spcBef>
+              <a:defRPr sz="2200">
+                <a:solidFill>
+                  <a:srgbClr val="FFFFFF"/>
+                </a:solidFill>
+              </a:defRPr>
+            </a:pPr>
+            <a:r>
+              <a:t>　</a:t>
+            </a:r>
+          </a:p>
+          <a:p>
+            <a:pPr>
+              <a:spcBef>
+                <a:spcPts val="300"/>
+              </a:spcBef>
+              <a:defRPr sz="2200">
+                <a:solidFill>
+                  <a:srgbClr val="FFFFFF"/>
+                </a:solidFill>
+              </a:defRPr>
+            </a:pPr>
+            <a:r>
+              <a:t>天下莫柔弱于水，</a:t>
+            </a:r>
+          </a:p>
+          <a:p>
+            <a:pPr>
+              <a:spcBef>
+                <a:spcPts val="300"/>
+              </a:spcBef>
+              <a:defRPr sz="2200">
+                <a:solidFill>
+                  <a:srgbClr val="FFFFFF"/>
+                </a:solidFill>
+              </a:defRPr>
+            </a:pPr>
+            <a:r>
+              <a:t>而攻坚强者莫之能胜。</a:t>
+            </a:r>
+          </a:p>
+          <a:p>
+            <a:pPr>
+              <a:spcBef>
+                <a:spcPts val="300"/>
+              </a:spcBef>
+              <a:defRPr sz="2200">
+                <a:solidFill>
+                  <a:srgbClr val="FFFFFF"/>
+                </a:solidFill>
+              </a:defRPr>
+            </a:pPr>
+            <a:r>
+              <a:t>　</a:t>
+            </a:r>
+          </a:p>
+          <a:p>
+            <a:pPr>
+              <a:spcBef>
+                <a:spcPts val="300"/>
+              </a:spcBef>
+              <a:defRPr sz="2200">
+                <a:solidFill>
+                  <a:srgbClr val="FFFFFF"/>
+                </a:solidFill>
+              </a:defRPr>
+            </a:pPr>
+            <a:r>
+              <a:t>其无以易之。</a:t>
+            </a:r>
+          </a:p>
+          <a:p>
+            <a:pPr>
+              <a:spcBef>
+                <a:spcPts val="300"/>
+              </a:spcBef>
+              <a:defRPr sz="2200">
+                <a:solidFill>
+                  <a:srgbClr val="FFFFFF"/>
+                </a:solidFill>
+              </a:defRPr>
+            </a:pPr>
+            <a:r>
+              <a:t>　</a:t>
+            </a:r>
+          </a:p>
+          <a:p>
+            <a:pPr>
+              <a:spcBef>
+                <a:spcPts val="300"/>
+              </a:spcBef>
+              <a:defRPr sz="2200">
+                <a:solidFill>
+                  <a:srgbClr val="FFFFFF"/>
+                </a:solidFill>
+              </a:defRPr>
+            </a:pPr>
+            <a:r>
+              <a:t>柔弱胜刚强。</a:t>
+            </a:r>
+          </a:p>
+          <a:p>
+            <a:pPr>
+              <a:spcBef>
+                <a:spcPts val="300"/>
+              </a:spcBef>
+              <a:defRPr sz="2200">
+                <a:solidFill>
+                  <a:srgbClr val="FFFFFF"/>
+                </a:solidFill>
+              </a:defRPr>
+            </a:pPr>
+            <a:r>
+              <a:t>　</a:t>
+            </a:r>
+          </a:p>
+          <a:p>
+            <a:pPr>
+              <a:spcBef>
+                <a:spcPts val="300"/>
+              </a:spcBef>
+              <a:defRPr sz="2200">
+                <a:solidFill>
+                  <a:srgbClr val="FFFFFF"/>
+                </a:solidFill>
+              </a:defRPr>
+            </a:pPr>
+            <a:r>
+              <a:t>弱之胜强，柔之胜刚，</a:t>
+            </a:r>
+          </a:p>
+          <a:p>
+            <a:pPr>
+              <a:spcBef>
+                <a:spcPts val="300"/>
+              </a:spcBef>
+              <a:defRPr sz="2200">
+                <a:solidFill>
+                  <a:srgbClr val="FFFFFF"/>
+                </a:solidFill>
+              </a:defRPr>
+            </a:pPr>
+            <a:r>
+              <a:t>天下莫不知，莫能行。</a:t>
+            </a:r>
+          </a:p>
+        </p:txBody>
+      </p:sp>
+      <p:sp>
+        <p:nvSpPr>
+          <p:cNvPr id="5" name="Rounded Rectangle 4"/>
+          <p:cNvSpPr/>
+          <p:nvPr/>
+        </p:nvSpPr>
+        <p:spPr>
+          <a:xfrm>
+            <a:off x="457200" y="5577840"/>
+            <a:ext cx="8229600" cy="1463040"/>
+          </a:xfrm>
+          <a:prstGeom prst="roundRect">
+            <a:avLst/>
+          </a:prstGeom>
+          <a:solidFill>
+            <a:srgbClr val="F5F7FA"/>
+          </a:solidFill>
+          <a:ln>
+            <a:solidFill>
+              <a:srgbClr val="4682B4"/>
+            </a:solidFill>
+          </a:ln>
+        </p:spPr>
+        <p:style>
+          <a:lnRef idx="1">
+            <a:schemeClr val="accent1"/>
+          </a:lnRef>
+          <a:fillRef idx="3">
+            <a:schemeClr val="accent1"/>
+          </a:fillRef>
+          <a:effectRef idx="2">
+            <a:schemeClr val="accent1"/>
+          </a:effectRef>
+          <a:fontRef idx="minor">
+            <a:schemeClr val="lt1"/>
+          </a:fontRef>
+        </p:style>
+        <p:txBody>
+          <a:bodyPr rtlCol="0" anchor="ctr" wrap="square"/>
+          <a:lstStyle/>
+          <a:p>
+            <a:pPr algn="ctr">
+              <a:defRPr sz="1500" b="1">
+                <a:solidFill>
+                  <a:srgbClr val="1E3C72"/>
+                </a:solidFill>
+              </a:defRPr>
+            </a:pPr>
+            <a:r>
+              <a:t>【白话解读】</a:t>
+            </a:r>
+          </a:p>
+          <a:p>
+            <a:pPr>
+              <a:spcBef>
+                <a:spcPts val="500"/>
+              </a:spcBef>
+              <a:defRPr sz="1800">
                 <a:solidFill>
                   <a:srgbClr val="333333"/>
                 </a:solidFill>
               </a:defRPr>
             </a:pPr>
             <a:r>
-              <a:t>【白话解读】人民所以饥饿，是因为统治者收取赋税太多，所以人民饥饿。人民所以难以治理，是因为统治者妄作为，所以人民难以治理。人民所以轻生冒死，是因为统治者过分追求自己的生活享受，所以人民轻生冒死。只有不追求生活享受的人，才比过分追求生活享受的人更高明。</a:t>
+              <a:t>天下最柔弱的东西，能够穿透最坚硬的东西。无形的存在能够进入没有间隙的地方。我因此知道无为是有益的。天下没有什么比水更柔弱，但攻坚克强却没有能胜过水的。因为没有什么可以替代它。柔弱能战胜刚强。弱能胜强，柔能胜刚，天下没有人不知道，但没有人能够实行。</a:t>
             </a:r>
           </a:p>
         </p:txBody>
@@ -6231,8 +7180,8 @@
         </p:nvSpPr>
         <p:spPr>
           <a:xfrm>
-            <a:off x="8503920" y="6492240"/>
-            <a:ext cx="457200" cy="274320"/>
+            <a:off x="8229600" y="6492240"/>
+            <a:ext cx="731520" cy="274320"/>
           </a:xfrm>
           <a:prstGeom prst="rect">
             <a:avLst/>
@@ -6246,14 +7195,14 @@
           <a:lstStyle/>
           <a:p>
             <a:pPr algn="r">
-              <a:defRPr sz="1000">
+              <a:defRPr sz="1200">
                 <a:solidFill>
                   <a:srgbClr val="969696"/>
                 </a:solidFill>
               </a:defRPr>
             </a:pPr>
             <a:r>
-              <a:t>6/12</a:t>
+              <a:t>6/14</a:t>
             </a:r>
           </a:p>
         </p:txBody>
@@ -6285,13 +7234,13 @@
         <p:spPr>
           <a:xfrm>
             <a:off x="0" y="0"/>
-            <a:ext cx="9144000" cy="1005840"/>
+            <a:ext cx="9144000" cy="1188720"/>
           </a:xfrm>
           <a:prstGeom prst="rect">
             <a:avLst/>
           </a:prstGeom>
           <a:solidFill>
-            <a:srgbClr val="00529B"/>
+            <a:srgbClr val="1E3C72"/>
           </a:solidFill>
           <a:ln>
             <a:noFill/>
@@ -6327,8 +7276,8 @@
         </p:nvSpPr>
         <p:spPr>
           <a:xfrm>
-            <a:off x="457200" y="228600"/>
-            <a:ext cx="8229600" cy="640080"/>
+            <a:off x="548640" y="274320"/>
+            <a:ext cx="8229600" cy="731520"/>
           </a:xfrm>
           <a:prstGeom prst="rect">
             <a:avLst/>
@@ -6342,14 +7291,14 @@
           <a:lstStyle/>
           <a:p>
             <a:pPr>
-              <a:defRPr sz="2800" b="1">
+              <a:defRPr sz="3000" b="1">
                 <a:solidFill>
                   <a:srgbClr val="FFFFFF"/>
                 </a:solidFill>
               </a:defRPr>
             </a:pPr>
             <a:r>
-              <a:t>第七十五章 · 核心思想</a:t>
+              <a:t>第七十七章 · 逐句释义</a:t>
             </a:r>
           </a:p>
         </p:txBody>
@@ -6362,14 +7311,14 @@
         </p:nvSpPr>
         <p:spPr>
           <a:xfrm>
-            <a:off x="457200" y="1188720"/>
-            <a:ext cx="8229600" cy="1097280"/>
+            <a:off x="457200" y="1371600"/>
+            <a:ext cx="8229600" cy="1143000"/>
           </a:xfrm>
           <a:prstGeom prst="roundRect">
             <a:avLst/>
           </a:prstGeom>
           <a:solidFill>
-            <a:srgbClr val="007AC2"/>
+            <a:srgbClr val="F5F7FA"/>
           </a:solidFill>
         </p:spPr>
         <p:style>
@@ -6391,26 +7340,29 @@
           <a:lstStyle/>
           <a:p>
             <a:pPr algn="ctr">
-              <a:defRPr sz="1800" b="1">
-                <a:solidFill>
-                  <a:srgbClr val="FFFFFF"/>
-                </a:solidFill>
-              </a:defRPr>
-            </a:pPr>
-            <a:r>
-              <a:t>🌟 核心观点</a:t>
-            </a:r>
-          </a:p>
-          <a:p>
-            <a:pPr>
-              <a:defRPr sz="1400">
-                <a:solidFill>
-                  <a:srgbClr val="E6E6E6"/>
-                </a:solidFill>
-              </a:defRPr>
-            </a:pPr>
-            <a:r>
-              <a:t>民之饥，以其上食税之多——人民的苦难根源在于统治者的贪婪。无为而治，才是治本之策。</a:t>
+              <a:defRPr sz="1700" b="1">
+                <a:solidFill>
+                  <a:srgbClr val="1E3C72"/>
+                </a:solidFill>
+              </a:defRPr>
+            </a:pPr>
+            <a:r>
+              <a:t>① 天下之至柔，驰骋天下之至坚</a:t>
+            </a:r>
+          </a:p>
+          <a:p>
+            <a:pPr>
+              <a:spcBef>
+                <a:spcPts val="400"/>
+              </a:spcBef>
+              <a:defRPr sz="1500">
+                <a:solidFill>
+                  <a:srgbClr val="333333"/>
+                </a:solidFill>
+              </a:defRPr>
+            </a:pPr>
+            <a:r>
+              <a:t>天下最柔弱的东西，能驾驭最坚硬的东西——水能穿石，风能蚀木，柔弱之力超越强硬。</a:t>
             </a:r>
           </a:p>
         </p:txBody>
@@ -6423,14 +7375,14 @@
         </p:nvSpPr>
         <p:spPr>
           <a:xfrm>
-            <a:off x="457200" y="2377440"/>
-            <a:ext cx="8229600" cy="914400"/>
+            <a:off x="457200" y="2606040"/>
+            <a:ext cx="8229600" cy="1143000"/>
           </a:xfrm>
           <a:prstGeom prst="roundRect">
             <a:avLst/>
           </a:prstGeom>
           <a:solidFill>
-            <a:srgbClr val="F2F6FA"/>
+            <a:srgbClr val="F5F7FA"/>
           </a:solidFill>
         </p:spPr>
         <p:style>
@@ -6452,26 +7404,29 @@
           <a:lstStyle/>
           <a:p>
             <a:pPr algn="ctr">
-              <a:defRPr sz="1400" b="1">
-                <a:solidFill>
-                  <a:srgbClr val="00529B"/>
-                </a:solidFill>
-              </a:defRPr>
-            </a:pPr>
-            <a:r>
-              <a:t>1. 民之饥</a:t>
-            </a:r>
-          </a:p>
-          <a:p>
-            <a:pPr>
-              <a:defRPr sz="1200">
+              <a:defRPr sz="1700" b="1">
+                <a:solidFill>
+                  <a:srgbClr val="1E3C72"/>
+                </a:solidFill>
+              </a:defRPr>
+            </a:pPr>
+            <a:r>
+              <a:t>② 无有入无间</a:t>
+            </a:r>
+          </a:p>
+          <a:p>
+            <a:pPr>
+              <a:spcBef>
+                <a:spcPts val="400"/>
+              </a:spcBef>
+              <a:defRPr sz="1500">
                 <a:solidFill>
                   <a:srgbClr val="333333"/>
                 </a:solidFill>
               </a:defRPr>
             </a:pPr>
             <a:r>
-              <a:t>税赋繁重是人民饥饿的根源——官府盘剥是社会动乱的导火索。</a:t>
+              <a:t>无形的力量能够穿透没有间隙的东西——'无'比'有'更有力量，无为比妄为更有效果。</a:t>
             </a:r>
           </a:p>
         </p:txBody>
@@ -6484,14 +7439,14 @@
         </p:nvSpPr>
         <p:spPr>
           <a:xfrm>
-            <a:off x="457200" y="3383280"/>
-            <a:ext cx="8229600" cy="914400"/>
+            <a:off x="457200" y="3840480"/>
+            <a:ext cx="8229600" cy="1143000"/>
           </a:xfrm>
           <a:prstGeom prst="roundRect">
             <a:avLst/>
           </a:prstGeom>
           <a:solidFill>
-            <a:srgbClr val="F2F6FA"/>
+            <a:srgbClr val="F5F7FA"/>
           </a:solidFill>
         </p:spPr>
         <p:style>
@@ -6513,26 +7468,29 @@
           <a:lstStyle/>
           <a:p>
             <a:pPr algn="ctr">
-              <a:defRPr sz="1400" b="1">
-                <a:solidFill>
-                  <a:srgbClr val="00529B"/>
-                </a:solidFill>
-              </a:defRPr>
-            </a:pPr>
-            <a:r>
-              <a:t>2. 民之难治</a:t>
-            </a:r>
-          </a:p>
-          <a:p>
-            <a:pPr>
-              <a:defRPr sz="1200">
+              <a:defRPr sz="1700" b="1">
+                <a:solidFill>
+                  <a:srgbClr val="1E3C72"/>
+                </a:solidFill>
+              </a:defRPr>
+            </a:pPr>
+            <a:r>
+              <a:t>③ 天下莫柔弱于水，而攻坚强者莫之能胜</a:t>
+            </a:r>
+          </a:p>
+          <a:p>
+            <a:pPr>
+              <a:spcBef>
+                <a:spcPts val="400"/>
+              </a:spcBef>
+              <a:defRPr sz="1500">
                 <a:solidFill>
                   <a:srgbClr val="333333"/>
                 </a:solidFill>
               </a:defRPr>
             </a:pPr>
             <a:r>
-              <a:t>统治者的妄作非为是人民难以治理的原因——过多干预适得其反。</a:t>
+              <a:t>天下没有什么比水更柔弱，但攻坚强者没有能胜过水的——柔能克刚，以柔克刚是自然法则。</a:t>
             </a:r>
           </a:p>
         </p:txBody>
@@ -6545,14 +7503,14 @@
         </p:nvSpPr>
         <p:spPr>
           <a:xfrm>
-            <a:off x="457200" y="4389120"/>
-            <a:ext cx="8229600" cy="914400"/>
+            <a:off x="457200" y="5074920"/>
+            <a:ext cx="8229600" cy="1143000"/>
           </a:xfrm>
           <a:prstGeom prst="roundRect">
             <a:avLst/>
           </a:prstGeom>
           <a:solidFill>
-            <a:srgbClr val="F2F6FA"/>
+            <a:srgbClr val="F5F7FA"/>
           </a:solidFill>
         </p:spPr>
         <p:style>
@@ -6574,101 +7532,43 @@
           <a:lstStyle/>
           <a:p>
             <a:pPr algn="ctr">
-              <a:defRPr sz="1400" b="1">
-                <a:solidFill>
-                  <a:srgbClr val="00529B"/>
-                </a:solidFill>
-              </a:defRPr>
-            </a:pPr>
-            <a:r>
-              <a:t>3. 民之轻死</a:t>
-            </a:r>
-          </a:p>
-          <a:p>
-            <a:pPr>
-              <a:defRPr sz="1200">
+              <a:defRPr sz="1700" b="1">
+                <a:solidFill>
+                  <a:srgbClr val="1E3C72"/>
+                </a:solidFill>
+              </a:defRPr>
+            </a:pPr>
+            <a:r>
+              <a:t>④ 天下莫不知，莫能行</a:t>
+            </a:r>
+          </a:p>
+          <a:p>
+            <a:pPr>
+              <a:spcBef>
+                <a:spcPts val="400"/>
+              </a:spcBef>
+              <a:defRPr sz="1500">
                 <a:solidFill>
                   <a:srgbClr val="333333"/>
                 </a:solidFill>
               </a:defRPr>
             </a:pPr>
             <a:r>
-              <a:t>当生存成为奢望时，人民就会冒死反抗——逼上梁山的根源。</a:t>
-            </a:r>
-          </a:p>
-        </p:txBody>
-      </p:sp>
-      <p:sp>
-        <p:nvSpPr>
-          <p:cNvPr id="8" name="Rounded Rectangle 7"/>
-          <p:cNvSpPr/>
-          <p:nvPr/>
-        </p:nvSpPr>
-        <p:spPr>
-          <a:xfrm>
-            <a:off x="457200" y="5394960"/>
-            <a:ext cx="8229600" cy="914400"/>
-          </a:xfrm>
-          <a:prstGeom prst="roundRect">
-            <a:avLst/>
-          </a:prstGeom>
-          <a:solidFill>
-            <a:srgbClr val="F2F6FA"/>
-          </a:solidFill>
-        </p:spPr>
-        <p:style>
-          <a:lnRef idx="1">
-            <a:schemeClr val="accent1"/>
-          </a:lnRef>
-          <a:fillRef idx="3">
-            <a:schemeClr val="accent1"/>
-          </a:fillRef>
-          <a:effectRef idx="2">
-            <a:schemeClr val="accent1"/>
-          </a:effectRef>
-          <a:fontRef idx="minor">
-            <a:schemeClr val="lt1"/>
-          </a:fontRef>
-        </p:style>
-        <p:txBody>
-          <a:bodyPr rtlCol="0" anchor="ctr" wrap="square"/>
-          <a:lstStyle/>
-          <a:p>
-            <a:pPr algn="ctr">
-              <a:defRPr sz="1400" b="1">
-                <a:solidFill>
-                  <a:srgbClr val="00529B"/>
-                </a:solidFill>
-              </a:defRPr>
-            </a:pPr>
-            <a:r>
-              <a:t>4. 贤于贵生</a:t>
-            </a:r>
-          </a:p>
-          <a:p>
-            <a:pPr>
-              <a:defRPr sz="1200">
-                <a:solidFill>
-                  <a:srgbClr val="333333"/>
-                </a:solidFill>
-              </a:defRPr>
-            </a:pPr>
-            <a:r>
-              <a:t>不追求奢侈生活的人，比贪图享乐的人更高尚——朴素才是真。</a:t>
-            </a:r>
-          </a:p>
-        </p:txBody>
-      </p:sp>
-      <p:sp>
-        <p:nvSpPr>
-          <p:cNvPr id="9" name="TextBox 8"/>
+              <a:t>天下没有人不知道柔胜刚的道理，但没有人能够实行——知易行难，需要真正的智慧与修养。</a:t>
+            </a:r>
+          </a:p>
+        </p:txBody>
+      </p:sp>
+      <p:sp>
+        <p:nvSpPr>
+          <p:cNvPr id="8" name="TextBox 7"/>
           <p:cNvSpPr txBox="1"/>
           <p:nvPr/>
         </p:nvSpPr>
         <p:spPr>
           <a:xfrm>
-            <a:off x="8503920" y="6492240"/>
-            <a:ext cx="457200" cy="274320"/>
+            <a:off x="8229600" y="6492240"/>
+            <a:ext cx="731520" cy="274320"/>
           </a:xfrm>
           <a:prstGeom prst="rect">
             <a:avLst/>
@@ -6682,14 +7582,14 @@
           <a:lstStyle/>
           <a:p>
             <a:pPr algn="r">
-              <a:defRPr sz="1000">
+              <a:defRPr sz="1200">
                 <a:solidFill>
                   <a:srgbClr val="969696"/>
                 </a:solidFill>
               </a:defRPr>
             </a:pPr>
             <a:r>
-              <a:t>7/12</a:t>
+              <a:t>7/14</a:t>
             </a:r>
           </a:p>
         </p:txBody>
@@ -6721,13 +7621,13 @@
         <p:spPr>
           <a:xfrm>
             <a:off x="0" y="0"/>
-            <a:ext cx="9144000" cy="1005840"/>
+            <a:ext cx="9144000" cy="1188720"/>
           </a:xfrm>
           <a:prstGeom prst="rect">
             <a:avLst/>
           </a:prstGeom>
           <a:solidFill>
-            <a:srgbClr val="00529B"/>
+            <a:srgbClr val="1E3C72"/>
           </a:solidFill>
           <a:ln>
             <a:noFill/>
@@ -6763,8 +7663,8 @@
         </p:nvSpPr>
         <p:spPr>
           <a:xfrm>
-            <a:off x="457200" y="228600"/>
-            <a:ext cx="8229600" cy="640080"/>
+            <a:off x="548640" y="274320"/>
+            <a:ext cx="8229600" cy="731520"/>
           </a:xfrm>
           <a:prstGeom prst="rect">
             <a:avLst/>
@@ -6778,14 +7678,14 @@
           <a:lstStyle/>
           <a:p>
             <a:pPr>
-              <a:defRPr sz="2800" b="1">
+              <a:defRPr sz="3000" b="1">
                 <a:solidFill>
                   <a:srgbClr val="FFFFFF"/>
                 </a:solidFill>
               </a:defRPr>
             </a:pPr>
             <a:r>
-              <a:t>第七十三-七十五章 · 现代反思</a:t>
+              <a:t>第七十七章 · 本章小结</a:t>
             </a:r>
           </a:p>
         </p:txBody>
@@ -6798,14 +7698,14 @@
         </p:nvSpPr>
         <p:spPr>
           <a:xfrm>
-            <a:off x="457200" y="1280160"/>
-            <a:ext cx="8229600" cy="1188720"/>
+            <a:off x="457200" y="1371600"/>
+            <a:ext cx="8229600" cy="1280160"/>
           </a:xfrm>
           <a:prstGeom prst="roundRect">
             <a:avLst/>
           </a:prstGeom>
           <a:solidFill>
-            <a:srgbClr val="F2F6FA"/>
+            <a:srgbClr val="4682B4"/>
           </a:solidFill>
         </p:spPr>
         <p:style>
@@ -6827,26 +7727,26 @@
           <a:lstStyle/>
           <a:p>
             <a:pPr algn="ctr">
-              <a:defRPr sz="1600" b="1">
-                <a:solidFill>
-                  <a:srgbClr val="00529B"/>
-                </a:solidFill>
-              </a:defRPr>
-            </a:pPr>
-            <a:r>
-              <a:t>🧠 人生哲学</a:t>
-            </a:r>
-          </a:p>
-          <a:p>
-            <a:pPr>
-              <a:defRPr sz="1400">
-                <a:solidFill>
-                  <a:srgbClr val="333333"/>
-                </a:solidFill>
-              </a:defRPr>
-            </a:pPr>
-            <a:r>
-              <a:t>勇于不敢则活 → 真正的勇气是知道何时该退让，而非盲目冒进。</a:t>
+              <a:defRPr sz="1800" b="1">
+                <a:solidFill>
+                  <a:srgbClr val="FFFFFF"/>
+                </a:solidFill>
+              </a:defRPr>
+            </a:pPr>
+            <a:r>
+              <a:t>🌟 核心观点</a:t>
+            </a:r>
+          </a:p>
+          <a:p>
+            <a:pPr>
+              <a:defRPr sz="1500">
+                <a:solidFill>
+                  <a:srgbClr val="FFFFFF"/>
+                </a:solidFill>
+              </a:defRPr>
+            </a:pPr>
+            <a:r>
+              <a:t>柔弱胜刚强——天下最柔的水，能攻克天下最刚强的东西。以柔克刚，是道的智慧。</a:t>
             </a:r>
           </a:p>
         </p:txBody>
@@ -6859,14 +7759,14 @@
         </p:nvSpPr>
         <p:spPr>
           <a:xfrm>
-            <a:off x="457200" y="2560320"/>
-            <a:ext cx="8229600" cy="1188720"/>
+            <a:off x="457200" y="2834640"/>
+            <a:ext cx="8229600" cy="1143000"/>
           </a:xfrm>
           <a:prstGeom prst="roundRect">
             <a:avLst/>
           </a:prstGeom>
           <a:solidFill>
-            <a:srgbClr val="F2F6FA"/>
+            <a:srgbClr val="F5F7FA"/>
           </a:solidFill>
         </p:spPr>
         <p:style>
@@ -6888,26 +7788,29 @@
           <a:lstStyle/>
           <a:p>
             <a:pPr algn="ctr">
-              <a:defRPr sz="1600" b="1">
-                <a:solidFill>
-                  <a:srgbClr val="00529B"/>
-                </a:solidFill>
-              </a:defRPr>
-            </a:pPr>
-            <a:r>
-              <a:t>⚖️ 社会治理</a:t>
-            </a:r>
-          </a:p>
-          <a:p>
-            <a:pPr>
-              <a:defRPr sz="1400">
+              <a:defRPr sz="1700" b="1">
+                <a:solidFill>
+                  <a:srgbClr val="1E3C72"/>
+                </a:solidFill>
+              </a:defRPr>
+            </a:pPr>
+            <a:r>
+              <a:t>1. 至柔驰骋至坚</a:t>
+            </a:r>
+          </a:p>
+          <a:p>
+            <a:pPr>
+              <a:spcBef>
+                <a:spcPts val="400"/>
+              </a:spcBef>
+              <a:defRPr sz="1500">
                 <a:solidFill>
                   <a:srgbClr val="333333"/>
                 </a:solidFill>
               </a:defRPr>
             </a:pPr>
             <a:r>
-              <a:t>民不畏死 → 单纯依靠惩罚无法治理社会，要从根源解决不公。</a:t>
+              <a:t>最柔弱的东西能驾驭最坚硬的东西——柔弱不是无能，而是最具穿透力的力量。</a:t>
             </a:r>
           </a:p>
         </p:txBody>
@@ -6920,14 +7823,14 @@
         </p:nvSpPr>
         <p:spPr>
           <a:xfrm>
-            <a:off x="457200" y="3840479"/>
-            <a:ext cx="8229600" cy="1188720"/>
+            <a:off x="457200" y="4069080"/>
+            <a:ext cx="8229600" cy="1143000"/>
           </a:xfrm>
           <a:prstGeom prst="roundRect">
             <a:avLst/>
           </a:prstGeom>
           <a:solidFill>
-            <a:srgbClr val="F2F6FA"/>
+            <a:srgbClr val="F5F7FA"/>
           </a:solidFill>
         </p:spPr>
         <p:style>
@@ -6949,26 +7852,29 @@
           <a:lstStyle/>
           <a:p>
             <a:pPr algn="ctr">
-              <a:defRPr sz="1600" b="1">
-                <a:solidFill>
-                  <a:srgbClr val="00529B"/>
-                </a:solidFill>
-              </a:defRPr>
-            </a:pPr>
-            <a:r>
-              <a:t>💰 经济发展</a:t>
-            </a:r>
-          </a:p>
-          <a:p>
-            <a:pPr>
-              <a:defRPr sz="1400">
+              <a:defRPr sz="1700" b="1">
+                <a:solidFill>
+                  <a:srgbClr val="1E3C72"/>
+                </a:solidFill>
+              </a:defRPr>
+            </a:pPr>
+            <a:r>
+              <a:t>2. 无有入无间</a:t>
+            </a:r>
+          </a:p>
+          <a:p>
+            <a:pPr>
+              <a:spcBef>
+                <a:spcPts val="400"/>
+              </a:spcBef>
+              <a:defRPr sz="1500">
                 <a:solidFill>
                   <a:srgbClr val="333333"/>
                 </a:solidFill>
               </a:defRPr>
             </a:pPr>
             <a:r>
-              <a:t>食税之多 → 合理的税收制度是社会稳定的基础，过度剥削必招反抗。</a:t>
+              <a:t>无形的力量能穿透无隙的东西——无为胜有为，无形胜有形。</a:t>
             </a:r>
           </a:p>
         </p:txBody>
@@ -6981,14 +7887,14 @@
         </p:nvSpPr>
         <p:spPr>
           <a:xfrm>
-            <a:off x="457200" y="5120640"/>
-            <a:ext cx="8229600" cy="1188720"/>
+            <a:off x="457200" y="5303520"/>
+            <a:ext cx="8229600" cy="1143000"/>
           </a:xfrm>
           <a:prstGeom prst="roundRect">
             <a:avLst/>
           </a:prstGeom>
           <a:solidFill>
-            <a:srgbClr val="F2F6FA"/>
+            <a:srgbClr val="F5F7FA"/>
           </a:solidFill>
         </p:spPr>
         <p:style>
@@ -7010,40 +7916,107 @@
           <a:lstStyle/>
           <a:p>
             <a:pPr algn="ctr">
-              <a:defRPr sz="1600" b="1">
-                <a:solidFill>
-                  <a:srgbClr val="00529B"/>
-                </a:solidFill>
-              </a:defRPr>
-            </a:pPr>
-            <a:r>
-              <a:t>🌿 生活态度</a:t>
-            </a:r>
-          </a:p>
-          <a:p>
-            <a:pPr>
-              <a:defRPr sz="1400">
+              <a:defRPr sz="1700" b="1">
+                <a:solidFill>
+                  <a:srgbClr val="1E3C72"/>
+                </a:solidFill>
+              </a:defRPr>
+            </a:pPr>
+            <a:r>
+              <a:t>3. 水之柔弱</a:t>
+            </a:r>
+          </a:p>
+          <a:p>
+            <a:pPr>
+              <a:spcBef>
+                <a:spcPts val="400"/>
+              </a:spcBef>
+              <a:defRPr sz="1500">
                 <a:solidFill>
                   <a:srgbClr val="333333"/>
                 </a:solidFill>
               </a:defRPr>
             </a:pPr>
             <a:r>
-              <a:t>贤于贵生 → 不攀比、不奢靡，知足常乐才是真正的富足。</a:t>
-            </a:r>
-          </a:p>
-        </p:txBody>
-      </p:sp>
-      <p:sp>
-        <p:nvSpPr>
-          <p:cNvPr id="8" name="TextBox 7"/>
+              <a:t>水虽柔弱却能攻克坚强——柔弱胜刚强是最普遍的自然法则。</a:t>
+            </a:r>
+          </a:p>
+        </p:txBody>
+      </p:sp>
+      <p:sp>
+        <p:nvSpPr>
+          <p:cNvPr id="8" name="Rounded Rectangle 7"/>
+          <p:cNvSpPr/>
+          <p:nvPr/>
+        </p:nvSpPr>
+        <p:spPr>
+          <a:xfrm>
+            <a:off x="457200" y="6537960"/>
+            <a:ext cx="8229600" cy="1143000"/>
+          </a:xfrm>
+          <a:prstGeom prst="roundRect">
+            <a:avLst/>
+          </a:prstGeom>
+          <a:solidFill>
+            <a:srgbClr val="F5F7FA"/>
+          </a:solidFill>
+        </p:spPr>
+        <p:style>
+          <a:lnRef idx="1">
+            <a:schemeClr val="accent1"/>
+          </a:lnRef>
+          <a:fillRef idx="3">
+            <a:schemeClr val="accent1"/>
+          </a:fillRef>
+          <a:effectRef idx="2">
+            <a:schemeClr val="accent1"/>
+          </a:effectRef>
+          <a:fontRef idx="minor">
+            <a:schemeClr val="lt1"/>
+          </a:fontRef>
+        </p:style>
+        <p:txBody>
+          <a:bodyPr rtlCol="0" anchor="ctr" wrap="square"/>
+          <a:lstStyle/>
+          <a:p>
+            <a:pPr algn="ctr">
+              <a:defRPr sz="1700" b="1">
+                <a:solidFill>
+                  <a:srgbClr val="1E3C72"/>
+                </a:solidFill>
+              </a:defRPr>
+            </a:pPr>
+            <a:r>
+              <a:t>4. 知而不行</a:t>
+            </a:r>
+          </a:p>
+          <a:p>
+            <a:pPr>
+              <a:spcBef>
+                <a:spcPts val="400"/>
+              </a:spcBef>
+              <a:defRPr sz="1500">
+                <a:solidFill>
+                  <a:srgbClr val="333333"/>
+                </a:solidFill>
+              </a:defRPr>
+            </a:pPr>
+            <a:r>
+              <a:t>天下人莫不知柔胜刚，却莫能行——知道容易做到难，需要长期修养。</a:t>
+            </a:r>
+          </a:p>
+        </p:txBody>
+      </p:sp>
+      <p:sp>
+        <p:nvSpPr>
+          <p:cNvPr id="9" name="TextBox 8"/>
           <p:cNvSpPr txBox="1"/>
           <p:nvPr/>
         </p:nvSpPr>
         <p:spPr>
           <a:xfrm>
-            <a:off x="8503920" y="6492240"/>
-            <a:ext cx="457200" cy="274320"/>
+            <a:off x="8229600" y="6492240"/>
+            <a:ext cx="731520" cy="274320"/>
           </a:xfrm>
           <a:prstGeom prst="rect">
             <a:avLst/>
@@ -7057,14 +8030,14 @@
           <a:lstStyle/>
           <a:p>
             <a:pPr algn="r">
-              <a:defRPr sz="1000">
+              <a:defRPr sz="1200">
                 <a:solidFill>
                   <a:srgbClr val="969696"/>
                 </a:solidFill>
               </a:defRPr>
             </a:pPr>
             <a:r>
-              <a:t>8/12</a:t>
+              <a:t>8/14</a:t>
             </a:r>
           </a:p>
         </p:txBody>
@@ -7096,13 +8069,13 @@
         <p:spPr>
           <a:xfrm>
             <a:off x="0" y="0"/>
-            <a:ext cx="9144000" cy="1005840"/>
+            <a:ext cx="9144000" cy="1188720"/>
           </a:xfrm>
           <a:prstGeom prst="rect">
             <a:avLst/>
           </a:prstGeom>
           <a:solidFill>
-            <a:srgbClr val="00529B"/>
+            <a:srgbClr val="1E3C72"/>
           </a:solidFill>
           <a:ln>
             <a:noFill/>
@@ -7138,8 +8111,8 @@
         </p:nvSpPr>
         <p:spPr>
           <a:xfrm>
-            <a:off x="457200" y="228600"/>
-            <a:ext cx="8229600" cy="640080"/>
+            <a:off x="548640" y="274320"/>
+            <a:ext cx="8229600" cy="731520"/>
           </a:xfrm>
           <a:prstGeom prst="rect">
             <a:avLst/>
@@ -7153,14 +8126,14 @@
           <a:lstStyle/>
           <a:p>
             <a:pPr>
-              <a:defRPr sz="2800" b="1">
+              <a:defRPr sz="3000" b="1">
                 <a:solidFill>
                   <a:srgbClr val="FFFFFF"/>
                 </a:solidFill>
               </a:defRPr>
             </a:pPr>
             <a:r>
-              <a:t>🌍 西方思想对照</a:t>
+              <a:t>第七十八章 · 为而不争</a:t>
             </a:r>
           </a:p>
         </p:txBody>
@@ -7173,15 +8146,20 @@
         </p:nvSpPr>
         <p:spPr>
           <a:xfrm>
-            <a:off x="457200" y="1280160"/>
-            <a:ext cx="8229600" cy="1097280"/>
+            <a:off x="457200" y="1371600"/>
+            <a:ext cx="8229600" cy="3657600"/>
           </a:xfrm>
           <a:prstGeom prst="roundRect">
             <a:avLst/>
           </a:prstGeom>
           <a:solidFill>
-            <a:srgbClr val="F2F6FA"/>
+            <a:srgbClr val="14233C"/>
           </a:solidFill>
+          <a:ln>
+            <a:solidFill>
+              <a:srgbClr val="1E3C72"/>
+            </a:solidFill>
+          </a:ln>
         </p:spPr>
         <p:style>
           <a:lnRef idx="1">
@@ -7202,26 +8180,209 @@
           <a:lstStyle/>
           <a:p>
             <a:pPr algn="ctr">
-              <a:defRPr sz="1500" b="1">
-                <a:solidFill>
-                  <a:srgbClr val="00529B"/>
-                </a:solidFill>
-              </a:defRPr>
-            </a:pPr>
-            <a:r>
-              <a:t>老子 · 无为而治</a:t>
-            </a:r>
-          </a:p>
-          <a:p>
-            <a:pPr>
-              <a:defRPr sz="1300">
-                <a:solidFill>
-                  <a:srgbClr val="333333"/>
-                </a:solidFill>
-              </a:defRPr>
-            </a:pPr>
-            <a:r>
-              <a:t>天之道，不争而善胜——道家的自然法则，与斯宾诺莎的自然权利思想相通。约前500年</a:t>
+              <a:defRPr sz="1600" b="1">
+                <a:solidFill>
+                  <a:srgbClr val="4682B4"/>
+                </a:solidFill>
+              </a:defRPr>
+            </a:pPr>
+            <a:r>
+              <a:t>【原文】</a:t>
+            </a:r>
+          </a:p>
+          <a:p>
+            <a:pPr>
+              <a:spcBef>
+                <a:spcPts val="300"/>
+              </a:spcBef>
+              <a:defRPr sz="2200">
+                <a:solidFill>
+                  <a:srgbClr val="FFFFFF"/>
+                </a:solidFill>
+              </a:defRPr>
+            </a:pPr>
+            <a:r>
+              <a:t>天下莫柔弱于水，</a:t>
+            </a:r>
+          </a:p>
+          <a:p>
+            <a:pPr>
+              <a:spcBef>
+                <a:spcPts val="300"/>
+              </a:spcBef>
+              <a:defRPr sz="2200">
+                <a:solidFill>
+                  <a:srgbClr val="FFFFFF"/>
+                </a:solidFill>
+              </a:defRPr>
+            </a:pPr>
+            <a:r>
+              <a:t>而攻坚强者莫之能胜。</a:t>
+            </a:r>
+          </a:p>
+          <a:p>
+            <a:pPr>
+              <a:spcBef>
+                <a:spcPts val="300"/>
+              </a:spcBef>
+              <a:defRPr sz="2200">
+                <a:solidFill>
+                  <a:srgbClr val="FFFFFF"/>
+                </a:solidFill>
+              </a:defRPr>
+            </a:pPr>
+            <a:r>
+              <a:t>　</a:t>
+            </a:r>
+          </a:p>
+          <a:p>
+            <a:pPr>
+              <a:spcBef>
+                <a:spcPts val="300"/>
+              </a:spcBef>
+              <a:defRPr sz="2200">
+                <a:solidFill>
+                  <a:srgbClr val="FFFFFF"/>
+                </a:solidFill>
+              </a:defRPr>
+            </a:pPr>
+            <a:r>
+              <a:t>以柔克刚，以弱胜强。</a:t>
+            </a:r>
+          </a:p>
+          <a:p>
+            <a:pPr>
+              <a:spcBef>
+                <a:spcPts val="300"/>
+              </a:spcBef>
+              <a:defRPr sz="2200">
+                <a:solidFill>
+                  <a:srgbClr val="FFFFFF"/>
+                </a:solidFill>
+              </a:defRPr>
+            </a:pPr>
+            <a:r>
+              <a:t>　</a:t>
+            </a:r>
+          </a:p>
+          <a:p>
+            <a:pPr>
+              <a:spcBef>
+                <a:spcPts val="300"/>
+              </a:spcBef>
+              <a:defRPr sz="2200">
+                <a:solidFill>
+                  <a:srgbClr val="FFFFFF"/>
+                </a:solidFill>
+              </a:defRPr>
+            </a:pPr>
+            <a:r>
+              <a:t>知其雄，守其雌，</a:t>
+            </a:r>
+          </a:p>
+          <a:p>
+            <a:pPr>
+              <a:spcBef>
+                <a:spcPts val="300"/>
+              </a:spcBef>
+              <a:defRPr sz="2200">
+                <a:solidFill>
+                  <a:srgbClr val="FFFFFF"/>
+                </a:solidFill>
+              </a:defRPr>
+            </a:pPr>
+            <a:r>
+              <a:t>此为溪常德。</a:t>
+            </a:r>
+          </a:p>
+          <a:p>
+            <a:pPr>
+              <a:spcBef>
+                <a:spcPts val="300"/>
+              </a:spcBef>
+              <a:defRPr sz="2200">
+                <a:solidFill>
+                  <a:srgbClr val="FFFFFF"/>
+                </a:solidFill>
+              </a:defRPr>
+            </a:pPr>
+            <a:r>
+              <a:t>　</a:t>
+            </a:r>
+          </a:p>
+          <a:p>
+            <a:pPr>
+              <a:spcBef>
+                <a:spcPts val="300"/>
+              </a:spcBef>
+              <a:defRPr sz="2200">
+                <a:solidFill>
+                  <a:srgbClr val="FFFFFF"/>
+                </a:solidFill>
+              </a:defRPr>
+            </a:pPr>
+            <a:r>
+              <a:t>复归于婴儿，</a:t>
+            </a:r>
+          </a:p>
+          <a:p>
+            <a:pPr>
+              <a:spcBef>
+                <a:spcPts val="300"/>
+              </a:spcBef>
+              <a:defRPr sz="2200">
+                <a:solidFill>
+                  <a:srgbClr val="FFFFFF"/>
+                </a:solidFill>
+              </a:defRPr>
+            </a:pPr>
+            <a:r>
+              <a:t>复归于朴。</a:t>
+            </a:r>
+          </a:p>
+          <a:p>
+            <a:pPr>
+              <a:spcBef>
+                <a:spcPts val="300"/>
+              </a:spcBef>
+              <a:defRPr sz="2200">
+                <a:solidFill>
+                  <a:srgbClr val="FFFFFF"/>
+                </a:solidFill>
+              </a:defRPr>
+            </a:pPr>
+            <a:r>
+              <a:t>　</a:t>
+            </a:r>
+          </a:p>
+          <a:p>
+            <a:pPr>
+              <a:spcBef>
+                <a:spcPts val="300"/>
+              </a:spcBef>
+              <a:defRPr sz="2200">
+                <a:solidFill>
+                  <a:srgbClr val="FFFFFF"/>
+                </a:solidFill>
+              </a:defRPr>
+            </a:pPr>
+            <a:r>
+              <a:t>为而不争，</a:t>
+            </a:r>
+          </a:p>
+          <a:p>
+            <a:pPr>
+              <a:spcBef>
+                <a:spcPts val="300"/>
+              </a:spcBef>
+              <a:defRPr sz="2200">
+                <a:solidFill>
+                  <a:srgbClr val="FFFFFF"/>
+                </a:solidFill>
+              </a:defRPr>
+            </a:pPr>
+            <a:r>
+              <a:t>天之道也。</a:t>
             </a:r>
           </a:p>
         </p:txBody>
@@ -7234,15 +8395,20 @@
         </p:nvSpPr>
         <p:spPr>
           <a:xfrm>
-            <a:off x="457200" y="2468880"/>
-            <a:ext cx="8229600" cy="1097280"/>
+            <a:off x="457200" y="5120640"/>
+            <a:ext cx="8229600" cy="1463040"/>
           </a:xfrm>
           <a:prstGeom prst="roundRect">
             <a:avLst/>
           </a:prstGeom>
           <a:solidFill>
-            <a:srgbClr val="F2F6FA"/>
+            <a:srgbClr val="F5F7FA"/>
           </a:solidFill>
+          <a:ln>
+            <a:solidFill>
+              <a:srgbClr val="4682B4"/>
+            </a:solidFill>
+          </a:ln>
         </p:spPr>
         <p:style>
           <a:lnRef idx="1">
@@ -7265,160 +8431,41 @@
             <a:pPr algn="ctr">
               <a:defRPr sz="1500" b="1">
                 <a:solidFill>
-                  <a:srgbClr val="00529B"/>
-                </a:solidFill>
-              </a:defRPr>
-            </a:pPr>
-            <a:r>
-              <a:t>霍布斯 · 社会契约</a:t>
-            </a:r>
-          </a:p>
-          <a:p>
-            <a:pPr>
-              <a:defRPr sz="1300">
+                  <a:srgbClr val="1E3C72"/>
+                </a:solidFill>
+              </a:defRPr>
+            </a:pPr>
+            <a:r>
+              <a:t>【白话解读】</a:t>
+            </a:r>
+          </a:p>
+          <a:p>
+            <a:pPr>
+              <a:spcBef>
+                <a:spcPts val="500"/>
+              </a:spcBef>
+              <a:defRPr sz="1800">
                 <a:solidFill>
                   <a:srgbClr val="333333"/>
                 </a:solidFill>
               </a:defRPr>
             </a:pPr>
             <a:r>
-              <a:t>民不畏死，奈何以死惧之——当人民不怕死亡时，统治者权威瓦解。1651年</a:t>
-            </a:r>
-          </a:p>
-        </p:txBody>
-      </p:sp>
-      <p:sp>
-        <p:nvSpPr>
-          <p:cNvPr id="6" name="Rounded Rectangle 5"/>
-          <p:cNvSpPr/>
-          <p:nvPr/>
-        </p:nvSpPr>
-        <p:spPr>
-          <a:xfrm>
-            <a:off x="457200" y="3657600"/>
-            <a:ext cx="8229600" cy="1097280"/>
-          </a:xfrm>
-          <a:prstGeom prst="roundRect">
-            <a:avLst/>
-          </a:prstGeom>
-          <a:solidFill>
-            <a:srgbClr val="F2F6FA"/>
-          </a:solidFill>
-        </p:spPr>
-        <p:style>
-          <a:lnRef idx="1">
-            <a:schemeClr val="accent1"/>
-          </a:lnRef>
-          <a:fillRef idx="3">
-            <a:schemeClr val="accent1"/>
-          </a:fillRef>
-          <a:effectRef idx="2">
-            <a:schemeClr val="accent1"/>
-          </a:effectRef>
-          <a:fontRef idx="minor">
-            <a:schemeClr val="lt1"/>
-          </a:fontRef>
-        </p:style>
-        <p:txBody>
-          <a:bodyPr rtlCol="0" anchor="ctr" wrap="square"/>
-          <a:lstStyle/>
-          <a:p>
-            <a:pPr algn="ctr">
-              <a:defRPr sz="1500" b="1">
-                <a:solidFill>
-                  <a:srgbClr val="00529B"/>
-                </a:solidFill>
-              </a:defRPr>
-            </a:pPr>
-            <a:r>
-              <a:t>卢梭 · 人民主权</a:t>
-            </a:r>
-          </a:p>
-          <a:p>
-            <a:pPr>
-              <a:defRPr sz="1300">
-                <a:solidFill>
-                  <a:srgbClr val="333333"/>
-                </a:solidFill>
-              </a:defRPr>
-            </a:pPr>
-            <a:r>
-              <a:t>税赋繁重导致人民起义——税收合法性来自人民的同意。1762年</a:t>
-            </a:r>
-          </a:p>
-        </p:txBody>
-      </p:sp>
-      <p:sp>
-        <p:nvSpPr>
-          <p:cNvPr id="7" name="Rounded Rectangle 6"/>
-          <p:cNvSpPr/>
-          <p:nvPr/>
-        </p:nvSpPr>
-        <p:spPr>
-          <a:xfrm>
-            <a:off x="457200" y="4846320"/>
-            <a:ext cx="8229600" cy="1097280"/>
-          </a:xfrm>
-          <a:prstGeom prst="roundRect">
-            <a:avLst/>
-          </a:prstGeom>
-          <a:solidFill>
-            <a:srgbClr val="F2F6FA"/>
-          </a:solidFill>
-        </p:spPr>
-        <p:style>
-          <a:lnRef idx="1">
-            <a:schemeClr val="accent1"/>
-          </a:lnRef>
-          <a:fillRef idx="3">
-            <a:schemeClr val="accent1"/>
-          </a:fillRef>
-          <a:effectRef idx="2">
-            <a:schemeClr val="accent1"/>
-          </a:effectRef>
-          <a:fontRef idx="minor">
-            <a:schemeClr val="lt1"/>
-          </a:fontRef>
-        </p:style>
-        <p:txBody>
-          <a:bodyPr rtlCol="0" anchor="ctr" wrap="square"/>
-          <a:lstStyle/>
-          <a:p>
-            <a:pPr algn="ctr">
-              <a:defRPr sz="1500" b="1">
-                <a:solidFill>
-                  <a:srgbClr val="00529B"/>
-                </a:solidFill>
-              </a:defRPr>
-            </a:pPr>
-            <a:r>
-              <a:t>亚当斯密 · 自由市场</a:t>
-            </a:r>
-          </a:p>
-          <a:p>
-            <a:pPr>
-              <a:defRPr sz="1300">
-                <a:solidFill>
-                  <a:srgbClr val="333333"/>
-                </a:solidFill>
-              </a:defRPr>
-            </a:pPr>
-            <a:r>
-              <a:t>不妄为才能治理好——政府少干预，市场自然运行。1776年</a:t>
-            </a:r>
-          </a:p>
-        </p:txBody>
-      </p:sp>
-      <p:sp>
-        <p:nvSpPr>
-          <p:cNvPr id="8" name="TextBox 7"/>
+              <a:t>天下没有什么比水更柔弱，但攻坚克强却没有能胜过水的。以柔克刚，以弱胜强。知道什么是雄强，却甘愿处于雌柔，这就是接近永恒的德。再回归到婴儿般纯朴的状态，再回归到道的本源。有所作为但不与人争夺，这是自然的法则。</a:t>
+            </a:r>
+          </a:p>
+        </p:txBody>
+      </p:sp>
+      <p:sp>
+        <p:nvSpPr>
+          <p:cNvPr id="6" name="TextBox 5"/>
           <p:cNvSpPr txBox="1"/>
           <p:nvPr/>
         </p:nvSpPr>
         <p:spPr>
           <a:xfrm>
-            <a:off x="8503920" y="6492240"/>
-            <a:ext cx="457200" cy="274320"/>
+            <a:off x="8229600" y="6492240"/>
+            <a:ext cx="731520" cy="274320"/>
           </a:xfrm>
           <a:prstGeom prst="rect">
             <a:avLst/>
@@ -7432,14 +8479,14 @@
           <a:lstStyle/>
           <a:p>
             <a:pPr algn="r">
-              <a:defRPr sz="1000">
+              <a:defRPr sz="1200">
                 <a:solidFill>
                   <a:srgbClr val="969696"/>
                 </a:solidFill>
               </a:defRPr>
             </a:pPr>
             <a:r>
-              <a:t>9/12</a:t>
+              <a:t>9/14</a:t>
             </a:r>
           </a:p>
         </p:txBody>
